--- a/docs/presentation/v5/going-v5-class-presentation.pptx
+++ b/docs/presentation/v5/going-v5-class-presentation.pptx
@@ -412,1433 +412,1433 @@
 </file>
 
 <file path=ppt/notesSlides/notesSlide1.xml><?xml version="1.0" encoding="utf-8"?>
-<p:notes xmlns:p="http://schemas.openxmlformats.org/presentationml/2006/main">
-  <p:cSld>
-    <p:spTree>
-      <p:nvGrpSpPr>
-        <p:cNvPr id="1" name=""/>
-        <p:cNvGrpSpPr/>
-        <p:nvPr/>
-      </p:nvGrpSpPr>
-      <p:grpSpPr>
-        <a:xfrm xmlns:a="http://schemas.openxmlformats.org/drawingml/2006/main"/>
-      </p:grpSpPr>
-      <p:sp>
-        <p:nvSpPr>
-          <p:cNvPr id="2" name="Slide Image Placeholder 1"/>
-          <p:cNvSpPr>
-            <a:spLocks xmlns:a="http://schemas.openxmlformats.org/drawingml/2006/main" noGrp="1"/>
-          </p:cNvSpPr>
-          <p:nvPr>
-            <p:ph type="sldImg" idx="0"/>
-          </p:nvPr>
-        </p:nvSpPr>
-        <p:spPr/>
-      </p:sp>
-      <p:sp>
-        <p:nvSpPr>
-          <p:cNvPr id="3" name="Notes Placeholder 2"/>
-          <p:cNvSpPr>
-            <a:spLocks xmlns:a="http://schemas.openxmlformats.org/drawingml/2006/main" noGrp="1"/>
-          </p:cNvSpPr>
-          <p:nvPr>
-            <p:ph type="body" idx="1"/>
-          </p:nvPr>
-        </p:nvSpPr>
-        <p:spPr/>
-        <p:txBody>
-          <a:bodyPr xmlns:a="http://schemas.openxmlformats.org/drawingml/2006/main"/>
-          <a:lstStyle xmlns:a="http://schemas.openxmlformats.org/drawingml/2006/main"/>
-          <a:p xmlns:a="http://schemas.openxmlformats.org/drawingml/2006/main">
-            <a:r>
-              <a:t>[목표 45초]</a:t>
-            </a:r>
-          </a:p>
-          <a:p xmlns:a="http://schemas.openxmlformats.org/drawingml/2006/main">
-            <a:r>
-              <a:t/>
-            </a:r>
-          </a:p>
-          <a:p xmlns:a="http://schemas.openxmlformats.org/drawingml/2006/main">
-            <a:r>
-              <a:t>안녕하세요. 제가 만든 여행 서비스 고잉을 소개하겠습니다.</a:t>
-            </a:r>
-          </a:p>
-          <a:p xmlns:a="http://schemas.openxmlformats.org/drawingml/2006/main">
-            <a:r>
-              <a:t/>
-            </a:r>
-          </a:p>
-          <a:p xmlns:a="http://schemas.openxmlformats.org/drawingml/2006/main">
-            <a:r>
-              <a:t>저는 여행하는 것도 좋아하고, 새로운 음식점을 찾아다니는 것도 좋아합니다. 그런데 여행을 갈 때마다 어디를 가야 할지 다시 검색하고, 리뷰를 읽고, 숙소에서 얼마나 먼지 비교하는 게 생각보다 번거로웠습니다. 예약을 해 놓고도 시간이 기억나지 않아서 메일함을 다시 찾는 일도 있었고요.</a:t>
-            </a:r>
-          </a:p>
-          <a:p xmlns:a="http://schemas.openxmlformats.org/drawingml/2006/main">
-            <a:r>
-              <a:t/>
-            </a:r>
-          </a:p>
-          <a:p xmlns:a="http://schemas.openxmlformats.org/drawingml/2006/main">
-            <a:r>
-              <a:t>그래서 제가 여행을 준비할 때 직접 쓰고 싶은 서비스를 만들어 봤습니다. 예약 메일을 정리하는 기능에서 시작해서, 지금은 식당을 찾고 일정에 넣는 과정까지 연결했습니다. 오늘은 어떤 기능이 있는지 먼저 보여드리고, 추천은 어떻게 계산하는지 설명드리겠습니다.</a:t>
-            </a:r>
-          </a:p>
-          <a:p xmlns:a="http://schemas.openxmlformats.org/drawingml/2006/main">
-            <a:r>
-              <a:t/>
-            </a:r>
-          </a:p>
-          <a:p xmlns:a="http://schemas.openxmlformats.org/drawingml/2006/main">
-            <a:r>
-              <a:t>화면 안내: 제목과 여행 가방 로고를 보여주고, 만든 계기부터 이야기합니다.</a:t>
-            </a:r>
-          </a:p>
-          <a:p xmlns:a="http://schemas.openxmlformats.org/drawingml/2006/main">
-            <a:r>
-              <a:t/>
-            </a:r>
-          </a:p>
-          <a:p xmlns:a="http://schemas.openxmlformats.org/drawingml/2006/main">
-            <a:r>
-              <a:t>낭독하지 않음</a:t>
-            </a:r>
-          </a:p>
-          <a:p xmlns:a="http://schemas.openxmlformats.org/drawingml/2006/main">
-            <a:r>
-              <a:t>코드·기능: https://github.com/Jin-s-work/Travel-Agent</a:t>
-            </a:r>
-          </a:p>
-          <a:p xmlns:a="http://schemas.openxmlformats.org/drawingml/2006/main">
-            <a:r>
-              <a:t>모델과 수식: docs/service-v4/RECOMMENDATION_MODEL.md</a:t>
-            </a:r>
-          </a:p>
-          <a:p xmlns:a="http://schemas.openxmlformats.org/drawingml/2006/main">
-            <a:r>
-              <a:t>합성 개발 평가: docs/service-v4/reports/hybrid-v4-benchmark.md (실제 정확도·만족도 미측정)</a:t>
-            </a:r>
-          </a:p>
-          <a:p xmlns:a="http://schemas.openxmlformats.org/drawingml/2006/main">
-            <a:r>
-              <a:t>화면·사진: docs/presentation/CREDITS.md (2026-10-07 기존 합성 계정 화면). 엄격 언어 추천은 실제 품질 검증 전 OFF.</a:t>
-            </a:r>
-          </a:p>
-        </p:txBody>
-      </p:sp>
-      <p:sp>
-        <p:nvSpPr>
-          <p:cNvPr id="4" name="Slide Number Placeholder 3"/>
-          <p:cNvSpPr>
-            <a:spLocks xmlns:a="http://schemas.openxmlformats.org/drawingml/2006/main" noGrp="1"/>
-          </p:cNvSpPr>
-          <p:nvPr>
-            <p:ph type="sldNum" idx="5"/>
-          </p:nvPr>
-        </p:nvSpPr>
-        <p:spPr/>
-        <p:txBody>
-          <a:bodyPr xmlns:a="http://schemas.openxmlformats.org/drawingml/2006/main"/>
-          <a:lstStyle xmlns:a="http://schemas.openxmlformats.org/drawingml/2006/main"/>
-          <a:p xmlns:a="http://schemas.openxmlformats.org/drawingml/2006/main"/>
-        </p:txBody>
-      </p:sp>
-    </p:spTree>
-  </p:cSld>
-  <p:clrMapOvr>
-    <a:masterClrMapping xmlns:a="http://schemas.openxmlformats.org/drawingml/2006/main"/>
-  </p:clrMapOvr>
-</p:notes>
+<ns0:notes xmlns:ns0="http://schemas.openxmlformats.org/presentationml/2006/main" xmlns:ns1="http://schemas.openxmlformats.org/drawingml/2006/main">
+  <ns0:cSld>
+    <ns0:spTree>
+      <ns0:nvGrpSpPr>
+        <ns0:cNvPr id="1" name=""/>
+        <ns0:cNvGrpSpPr/>
+        <ns0:nvPr/>
+      </ns0:nvGrpSpPr>
+      <ns0:grpSpPr>
+        <ns1:xfrm/>
+      </ns0:grpSpPr>
+      <ns0:sp>
+        <ns0:nvSpPr>
+          <ns0:cNvPr id="2" name="Slide Image Placeholder 1"/>
+          <ns0:cNvSpPr>
+            <ns1:spLocks noGrp="1"/>
+          </ns0:cNvSpPr>
+          <ns0:nvPr>
+            <ns0:ph type="sldImg" idx="0"/>
+          </ns0:nvPr>
+        </ns0:nvSpPr>
+        <ns0:spPr/>
+      </ns0:sp>
+      <ns0:sp>
+        <ns0:nvSpPr>
+          <ns0:cNvPr id="3" name="Notes Placeholder 2"/>
+          <ns0:cNvSpPr>
+            <ns1:spLocks noGrp="1"/>
+          </ns0:cNvSpPr>
+          <ns0:nvPr>
+            <ns0:ph type="body" idx="1"/>
+          </ns0:nvPr>
+        </ns0:nvSpPr>
+        <ns0:spPr/>
+        <ns0:txBody>
+          <ns1:bodyPr/>
+          <ns1:lstStyle/>
+          <ns1:p>
+            <ns1:r>
+              <ns1:t/>
+            </ns1:r>
+          </ns1:p>
+          <ns1:p>
+            <ns1:r>
+              <ns1:t/>
+            </ns1:r>
+          </ns1:p>
+          <ns1:p>
+            <ns1:r>
+              <ns1:t/>
+            </ns1:r>
+          </ns1:p>
+          <ns1:p>
+            <ns1:r>
+              <ns1:t/>
+            </ns1:r>
+          </ns1:p>
+          <ns1:p>
+            <ns1:r>
+              <ns1:t/>
+            </ns1:r>
+          </ns1:p>
+          <ns1:p>
+            <ns1:r>
+              <ns1:t/>
+            </ns1:r>
+          </ns1:p>
+          <ns1:p>
+            <ns1:r>
+              <ns1:t/>
+            </ns1:r>
+          </ns1:p>
+          <ns1:p>
+            <ns1:r>
+              <ns1:t/>
+            </ns1:r>
+          </ns1:p>
+          <ns1:p>
+            <ns1:r>
+              <ns1:t/>
+            </ns1:r>
+          </ns1:p>
+          <ns1:p>
+            <ns1:r>
+              <ns1:t/>
+            </ns1:r>
+          </ns1:p>
+          <ns1:p>
+            <ns1:r>
+              <ns1:t/>
+            </ns1:r>
+          </ns1:p>
+          <ns1:p>
+            <ns1:r>
+              <ns1:t/>
+            </ns1:r>
+          </ns1:p>
+          <ns1:p>
+            <ns1:r>
+              <ns1:t/>
+            </ns1:r>
+          </ns1:p>
+          <ns1:p>
+            <ns1:r>
+              <ns1:t/>
+            </ns1:r>
+          </ns1:p>
+          <ns1:p>
+            <ns1:r>
+              <ns1:t/>
+            </ns1:r>
+          </ns1:p>
+        </ns0:txBody>
+      </ns0:sp>
+      <ns0:sp>
+        <ns0:nvSpPr>
+          <ns0:cNvPr id="4" name="Slide Number Placeholder 3"/>
+          <ns0:cNvSpPr>
+            <ns1:spLocks noGrp="1"/>
+          </ns0:cNvSpPr>
+          <ns0:nvPr>
+            <ns0:ph type="sldNum" idx="5"/>
+          </ns0:nvPr>
+        </ns0:nvSpPr>
+        <ns0:spPr/>
+        <ns0:txBody>
+          <ns1:bodyPr/>
+          <ns1:lstStyle/>
+          <ns1:p/>
+        </ns0:txBody>
+      </ns0:sp>
+    </ns0:spTree>
+  </ns0:cSld>
+  <ns0:clrMapOvr>
+    <ns1:masterClrMapping/>
+  </ns0:clrMapOvr>
+</ns0:notes>
 </file>
 
 <file path=ppt/notesSlides/notesSlide10.xml><?xml version="1.0" encoding="utf-8"?>
-<p:notes xmlns:p="http://schemas.openxmlformats.org/presentationml/2006/main">
-  <p:cSld>
-    <p:spTree>
-      <p:nvGrpSpPr>
-        <p:cNvPr id="1" name=""/>
-        <p:cNvGrpSpPr/>
-        <p:nvPr/>
-      </p:nvGrpSpPr>
-      <p:grpSpPr>
-        <a:xfrm xmlns:a="http://schemas.openxmlformats.org/drawingml/2006/main"/>
-      </p:grpSpPr>
-      <p:sp>
-        <p:nvSpPr>
-          <p:cNvPr id="2" name="Slide Image Placeholder 1"/>
-          <p:cNvSpPr>
-            <a:spLocks xmlns:a="http://schemas.openxmlformats.org/drawingml/2006/main" noGrp="1"/>
-          </p:cNvSpPr>
-          <p:nvPr>
-            <p:ph type="sldImg" idx="0"/>
-          </p:nvPr>
-        </p:nvSpPr>
-        <p:spPr/>
-      </p:sp>
-      <p:sp>
-        <p:nvSpPr>
-          <p:cNvPr id="3" name="Notes Placeholder 2"/>
-          <p:cNvSpPr>
-            <a:spLocks xmlns:a="http://schemas.openxmlformats.org/drawingml/2006/main" noGrp="1"/>
-          </p:cNvSpPr>
-          <p:nvPr>
-            <p:ph type="body" idx="1"/>
-          </p:nvPr>
-        </p:nvSpPr>
-        <p:spPr/>
-        <p:txBody>
-          <a:bodyPr xmlns:a="http://schemas.openxmlformats.org/drawingml/2006/main"/>
-          <a:lstStyle xmlns:a="http://schemas.openxmlformats.org/drawingml/2006/main"/>
-          <a:p xmlns:a="http://schemas.openxmlformats.org/drawingml/2006/main">
-            <a:r>
-              <a:t>[목표 45초]</a:t>
-            </a:r>
-          </a:p>
-          <a:p xmlns:a="http://schemas.openxmlformats.org/drawingml/2006/main">
-            <a:r>
-              <a:t/>
-            </a:r>
-          </a:p>
-          <a:p xmlns:a="http://schemas.openxmlformats.org/drawingml/2006/main">
-            <a:r>
-              <a:t>다음에는 기능 수를 늘리는 것보다 실제 자료와 사용 경험을 더 확인하려고 합니다.</a:t>
-            </a:r>
-          </a:p>
-          <a:p xmlns:a="http://schemas.openxmlformats.org/drawingml/2006/main">
-            <a:r>
-              <a:t/>
-            </a:r>
-          </a:p>
-          <a:p xmlns:a="http://schemas.openxmlformats.org/drawingml/2006/main">
-            <a:r>
-              <a:t>먼저 도쿄와 바르셀로나의 리뷰 원문과 이용 범위, 언어 판별 품질을 검증하고, 통과한 자료에서 현지어 추천을 켜고 싶습니다. 그다음에는 다른 사람이 평가한 후보로 지금의 추천 모델을 비교하려고 합니다. 실제 선택과 방문 피드백이 충분히 쌓이면 그때 학습 기반 개인화도 시도할 수 있습니다.</a:t>
-            </a:r>
-          </a:p>
-          <a:p xmlns:a="http://schemas.openxmlformats.org/drawingml/2006/main">
-            <a:r>
-              <a:t/>
-            </a:r>
-          </a:p>
-          <a:p xmlns:a="http://schemas.openxmlformats.org/drawingml/2006/main">
-            <a:r>
-              <a:t>도시 입력은 백 개 도시를 지원하지만 모든 도시의 추천 자료가 같은 수준으로 준비된 것은 아닙니다. 영업·예약 정보와 이동 경로를 더 채우고, 모바일과 오프라인을 실제 여행 환경에서도 확인할 계획입니다.</a:t>
-            </a:r>
-          </a:p>
-          <a:p xmlns:a="http://schemas.openxmlformats.org/drawingml/2006/main">
-            <a:r>
-              <a:t/>
-            </a:r>
-          </a:p>
-          <a:p xmlns:a="http://schemas.openxmlformats.org/drawingml/2006/main">
-            <a:r>
-              <a:t>제가 여행을 갈 때 매번 찾느라 불편했던 부분을 조금 덜어보려고 시작한 프로젝트입니다. 앞으로도 직접 써 보면서 고쳐나가고 싶습니다. 감사합니다.</a:t>
-            </a:r>
-          </a:p>
-          <a:p xmlns:a="http://schemas.openxmlformats.org/drawingml/2006/main">
-            <a:r>
-              <a:t/>
-            </a:r>
-          </a:p>
-          <a:p xmlns:a="http://schemas.openxmlformats.org/drawingml/2006/main">
-            <a:r>
-              <a:t>화면 안내: 실제 리뷰 → 독립 평가 → 현장 사용 순서로 설명하고 마칩니다.</a:t>
-            </a:r>
-          </a:p>
-          <a:p xmlns:a="http://schemas.openxmlformats.org/drawingml/2006/main">
-            <a:r>
-              <a:t/>
-            </a:r>
-          </a:p>
-          <a:p xmlns:a="http://schemas.openxmlformats.org/drawingml/2006/main">
-            <a:r>
-              <a:t>낭독하지 않음</a:t>
-            </a:r>
-          </a:p>
-          <a:p xmlns:a="http://schemas.openxmlformats.org/drawingml/2006/main">
-            <a:r>
-              <a:t>코드·기능: https://github.com/Jin-s-work/Travel-Agent</a:t>
-            </a:r>
-          </a:p>
-          <a:p xmlns:a="http://schemas.openxmlformats.org/drawingml/2006/main">
-            <a:r>
-              <a:t>모델과 수식: docs/service-v4/RECOMMENDATION_MODEL.md</a:t>
-            </a:r>
-          </a:p>
-          <a:p xmlns:a="http://schemas.openxmlformats.org/drawingml/2006/main">
-            <a:r>
-              <a:t>합성 개발 평가: docs/service-v4/reports/hybrid-v4-benchmark.md (실제 정확도·만족도 미측정)</a:t>
-            </a:r>
-          </a:p>
-          <a:p xmlns:a="http://schemas.openxmlformats.org/drawingml/2006/main">
-            <a:r>
-              <a:t>화면·사진: docs/presentation/CREDITS.md (2026-10-07 기존 합성 계정 화면). 엄격 언어 추천은 실제 품질 검증 전 OFF.</a:t>
-            </a:r>
-          </a:p>
-        </p:txBody>
-      </p:sp>
-      <p:sp>
-        <p:nvSpPr>
-          <p:cNvPr id="4" name="Slide Number Placeholder 3"/>
-          <p:cNvSpPr>
-            <a:spLocks xmlns:a="http://schemas.openxmlformats.org/drawingml/2006/main" noGrp="1"/>
-          </p:cNvSpPr>
-          <p:nvPr>
-            <p:ph type="sldNum" idx="5"/>
-          </p:nvPr>
-        </p:nvSpPr>
-        <p:spPr/>
-        <p:txBody>
-          <a:bodyPr xmlns:a="http://schemas.openxmlformats.org/drawingml/2006/main"/>
-          <a:lstStyle xmlns:a="http://schemas.openxmlformats.org/drawingml/2006/main"/>
-          <a:p xmlns:a="http://schemas.openxmlformats.org/drawingml/2006/main"/>
-        </p:txBody>
-      </p:sp>
-    </p:spTree>
-  </p:cSld>
-  <p:clrMapOvr>
-    <a:masterClrMapping xmlns:a="http://schemas.openxmlformats.org/drawingml/2006/main"/>
-  </p:clrMapOvr>
-</p:notes>
+<ns0:notes xmlns:ns0="http://schemas.openxmlformats.org/presentationml/2006/main" xmlns:ns1="http://schemas.openxmlformats.org/drawingml/2006/main">
+  <ns0:cSld>
+    <ns0:spTree>
+      <ns0:nvGrpSpPr>
+        <ns0:cNvPr id="1" name=""/>
+        <ns0:cNvGrpSpPr/>
+        <ns0:nvPr/>
+      </ns0:nvGrpSpPr>
+      <ns0:grpSpPr>
+        <ns1:xfrm/>
+      </ns0:grpSpPr>
+      <ns0:sp>
+        <ns0:nvSpPr>
+          <ns0:cNvPr id="2" name="Slide Image Placeholder 1"/>
+          <ns0:cNvSpPr>
+            <ns1:spLocks noGrp="1"/>
+          </ns0:cNvSpPr>
+          <ns0:nvPr>
+            <ns0:ph type="sldImg" idx="0"/>
+          </ns0:nvPr>
+        </ns0:nvSpPr>
+        <ns0:spPr/>
+      </ns0:sp>
+      <ns0:sp>
+        <ns0:nvSpPr>
+          <ns0:cNvPr id="3" name="Notes Placeholder 2"/>
+          <ns0:cNvSpPr>
+            <ns1:spLocks noGrp="1"/>
+          </ns0:cNvSpPr>
+          <ns0:nvPr>
+            <ns0:ph type="body" idx="1"/>
+          </ns0:nvPr>
+        </ns0:nvSpPr>
+        <ns0:spPr/>
+        <ns0:txBody>
+          <ns1:bodyPr/>
+          <ns1:lstStyle/>
+          <ns1:p>
+            <ns1:r>
+              <ns1:t/>
+            </ns1:r>
+          </ns1:p>
+          <ns1:p>
+            <ns1:r>
+              <ns1:t/>
+            </ns1:r>
+          </ns1:p>
+          <ns1:p>
+            <ns1:r>
+              <ns1:t/>
+            </ns1:r>
+          </ns1:p>
+          <ns1:p>
+            <ns1:r>
+              <ns1:t/>
+            </ns1:r>
+          </ns1:p>
+          <ns1:p>
+            <ns1:r>
+              <ns1:t/>
+            </ns1:r>
+          </ns1:p>
+          <ns1:p>
+            <ns1:r>
+              <ns1:t/>
+            </ns1:r>
+          </ns1:p>
+          <ns1:p>
+            <ns1:r>
+              <ns1:t/>
+            </ns1:r>
+          </ns1:p>
+          <ns1:p>
+            <ns1:r>
+              <ns1:t/>
+            </ns1:r>
+          </ns1:p>
+          <ns1:p>
+            <ns1:r>
+              <ns1:t/>
+            </ns1:r>
+          </ns1:p>
+          <ns1:p>
+            <ns1:r>
+              <ns1:t/>
+            </ns1:r>
+          </ns1:p>
+          <ns1:p>
+            <ns1:r>
+              <ns1:t/>
+            </ns1:r>
+          </ns1:p>
+          <ns1:p>
+            <ns1:r>
+              <ns1:t/>
+            </ns1:r>
+          </ns1:p>
+          <ns1:p>
+            <ns1:r>
+              <ns1:t/>
+            </ns1:r>
+          </ns1:p>
+          <ns1:p>
+            <ns1:r>
+              <ns1:t/>
+            </ns1:r>
+          </ns1:p>
+          <ns1:p>
+            <ns1:r>
+              <ns1:t/>
+            </ns1:r>
+          </ns1:p>
+          <ns1:p>
+            <ns1:r>
+              <ns1:t/>
+            </ns1:r>
+          </ns1:p>
+          <ns1:p>
+            <ns1:r>
+              <ns1:t/>
+            </ns1:r>
+          </ns1:p>
+        </ns0:txBody>
+      </ns0:sp>
+      <ns0:sp>
+        <ns0:nvSpPr>
+          <ns0:cNvPr id="4" name="Slide Number Placeholder 3"/>
+          <ns0:cNvSpPr>
+            <ns1:spLocks noGrp="1"/>
+          </ns0:cNvSpPr>
+          <ns0:nvPr>
+            <ns0:ph type="sldNum" idx="5"/>
+          </ns0:nvPr>
+        </ns0:nvSpPr>
+        <ns0:spPr/>
+        <ns0:txBody>
+          <ns1:bodyPr/>
+          <ns1:lstStyle/>
+          <ns1:p/>
+        </ns0:txBody>
+      </ns0:sp>
+    </ns0:spTree>
+  </ns0:cSld>
+  <ns0:clrMapOvr>
+    <ns1:masterClrMapping/>
+  </ns0:clrMapOvr>
+</ns0:notes>
 </file>
 
 <file path=ppt/notesSlides/notesSlide2.xml><?xml version="1.0" encoding="utf-8"?>
-<p:notes xmlns:p="http://schemas.openxmlformats.org/presentationml/2006/main">
-  <p:cSld>
-    <p:spTree>
-      <p:nvGrpSpPr>
-        <p:cNvPr id="1" name=""/>
-        <p:cNvGrpSpPr/>
-        <p:nvPr/>
-      </p:nvGrpSpPr>
-      <p:grpSpPr>
-        <a:xfrm xmlns:a="http://schemas.openxmlformats.org/drawingml/2006/main"/>
-      </p:grpSpPr>
-      <p:sp>
-        <p:nvSpPr>
-          <p:cNvPr id="2" name="Slide Image Placeholder 1"/>
-          <p:cNvSpPr>
-            <a:spLocks xmlns:a="http://schemas.openxmlformats.org/drawingml/2006/main" noGrp="1"/>
-          </p:cNvSpPr>
-          <p:nvPr>
-            <p:ph type="sldImg" idx="0"/>
-          </p:nvPr>
-        </p:nvSpPr>
-        <p:spPr/>
-      </p:sp>
-      <p:sp>
-        <p:nvSpPr>
-          <p:cNvPr id="3" name="Notes Placeholder 2"/>
-          <p:cNvSpPr>
-            <a:spLocks xmlns:a="http://schemas.openxmlformats.org/drawingml/2006/main" noGrp="1"/>
-          </p:cNvSpPr>
-          <p:nvPr>
-            <p:ph type="body" idx="1"/>
-          </p:nvPr>
-        </p:nvSpPr>
-        <p:spPr/>
-        <p:txBody>
-          <a:bodyPr xmlns:a="http://schemas.openxmlformats.org/drawingml/2006/main"/>
-          <a:lstStyle xmlns:a="http://schemas.openxmlformats.org/drawingml/2006/main"/>
-          <a:p xmlns:a="http://schemas.openxmlformats.org/drawingml/2006/main">
-            <a:r>
-              <a:t>[목표 40초]</a:t>
-            </a:r>
-          </a:p>
-          <a:p xmlns:a="http://schemas.openxmlformats.org/drawingml/2006/main">
-            <a:r>
-              <a:t/>
-            </a:r>
-          </a:p>
-          <a:p xmlns:a="http://schemas.openxmlformats.org/drawingml/2006/main">
-            <a:r>
-              <a:t>먼저 여행을 하나 만듭니다. 도시와 날짜를 정해 두면 메일을 올리거나 장소를 찾을 때 같은 내용을 계속 입력하지 않아도 됩니다. 숙소나 음식 취향처럼 추가로 필요한 정보는 나중에 넣을 수 있습니다.</a:t>
-            </a:r>
-          </a:p>
-          <a:p xmlns:a="http://schemas.openxmlformats.org/drawingml/2006/main">
-            <a:r>
-              <a:t/>
-            </a:r>
-          </a:p>
-          <a:p xmlns:a="http://schemas.openxmlformats.org/drawingml/2006/main">
-            <a:r>
-              <a:t>홈에서는 지금 어떤 여행을 보고 있는지, 예약은 어떻게 정리돼 있는지 확인할 수 있습니다. 메일을 먼저 올려도 되고, 아직 예약한 게 없으면 장소부터 찾아도 됩니다. 처음부터 모든 칸을 채워야 하는 방식은 피하려고 했습니다.</a:t>
-            </a:r>
-          </a:p>
-          <a:p xmlns:a="http://schemas.openxmlformats.org/drawingml/2006/main">
-            <a:r>
-              <a:t/>
-            </a:r>
-          </a:p>
-          <a:p xmlns:a="http://schemas.openxmlformats.org/drawingml/2006/main">
-            <a:r>
-              <a:t>지금 보여드리는 화면은 가상 예약을 넣어 둔 예시입니다. 실제 개인 메일이 화면에 나오지는 않습니다.</a:t>
-            </a:r>
-          </a:p>
-          <a:p xmlns:a="http://schemas.openxmlformats.org/drawingml/2006/main">
-            <a:r>
-              <a:t/>
-            </a:r>
-          </a:p>
-          <a:p xmlns:a="http://schemas.openxmlformats.org/drawingml/2006/main">
-            <a:r>
-              <a:t>화면 안내: 홈 화면의 여행 기간과 주요 진입점을 차례로 가리킵니다.</a:t>
-            </a:r>
-          </a:p>
-          <a:p xmlns:a="http://schemas.openxmlformats.org/drawingml/2006/main">
-            <a:r>
-              <a:t/>
-            </a:r>
-          </a:p>
-          <a:p xmlns:a="http://schemas.openxmlformats.org/drawingml/2006/main">
-            <a:r>
-              <a:t>낭독하지 않음</a:t>
-            </a:r>
-          </a:p>
-          <a:p xmlns:a="http://schemas.openxmlformats.org/drawingml/2006/main">
-            <a:r>
-              <a:t>코드·기능: https://github.com/Jin-s-work/Travel-Agent</a:t>
-            </a:r>
-          </a:p>
-          <a:p xmlns:a="http://schemas.openxmlformats.org/drawingml/2006/main">
-            <a:r>
-              <a:t>모델과 수식: docs/service-v4/RECOMMENDATION_MODEL.md</a:t>
-            </a:r>
-          </a:p>
-          <a:p xmlns:a="http://schemas.openxmlformats.org/drawingml/2006/main">
-            <a:r>
-              <a:t>합성 개발 평가: docs/service-v4/reports/hybrid-v4-benchmark.md (실제 정확도·만족도 미측정)</a:t>
-            </a:r>
-          </a:p>
-          <a:p xmlns:a="http://schemas.openxmlformats.org/drawingml/2006/main">
-            <a:r>
-              <a:t>화면·사진: docs/presentation/CREDITS.md (2026-10-07 기존 합성 계정 화면). 엄격 언어 추천은 실제 품질 검증 전 OFF.</a:t>
-            </a:r>
-          </a:p>
-        </p:txBody>
-      </p:sp>
-      <p:sp>
-        <p:nvSpPr>
-          <p:cNvPr id="4" name="Slide Number Placeholder 3"/>
-          <p:cNvSpPr>
-            <a:spLocks xmlns:a="http://schemas.openxmlformats.org/drawingml/2006/main" noGrp="1"/>
-          </p:cNvSpPr>
-          <p:nvPr>
-            <p:ph type="sldNum" idx="5"/>
-          </p:nvPr>
-        </p:nvSpPr>
-        <p:spPr/>
-        <p:txBody>
-          <a:bodyPr xmlns:a="http://schemas.openxmlformats.org/drawingml/2006/main"/>
-          <a:lstStyle xmlns:a="http://schemas.openxmlformats.org/drawingml/2006/main"/>
-          <a:p xmlns:a="http://schemas.openxmlformats.org/drawingml/2006/main"/>
-        </p:txBody>
-      </p:sp>
-    </p:spTree>
-  </p:cSld>
-  <p:clrMapOvr>
-    <a:masterClrMapping xmlns:a="http://schemas.openxmlformats.org/drawingml/2006/main"/>
-  </p:clrMapOvr>
-</p:notes>
+<ns0:notes xmlns:ns0="http://schemas.openxmlformats.org/presentationml/2006/main" xmlns:ns1="http://schemas.openxmlformats.org/drawingml/2006/main">
+  <ns0:cSld>
+    <ns0:spTree>
+      <ns0:nvGrpSpPr>
+        <ns0:cNvPr id="1" name=""/>
+        <ns0:cNvGrpSpPr/>
+        <ns0:nvPr/>
+      </ns0:nvGrpSpPr>
+      <ns0:grpSpPr>
+        <ns1:xfrm/>
+      </ns0:grpSpPr>
+      <ns0:sp>
+        <ns0:nvSpPr>
+          <ns0:cNvPr id="2" name="Slide Image Placeholder 1"/>
+          <ns0:cNvSpPr>
+            <ns1:spLocks noGrp="1"/>
+          </ns0:cNvSpPr>
+          <ns0:nvPr>
+            <ns0:ph type="sldImg" idx="0"/>
+          </ns0:nvPr>
+        </ns0:nvSpPr>
+        <ns0:spPr/>
+      </ns0:sp>
+      <ns0:sp>
+        <ns0:nvSpPr>
+          <ns0:cNvPr id="3" name="Notes Placeholder 2"/>
+          <ns0:cNvSpPr>
+            <ns1:spLocks noGrp="1"/>
+          </ns0:cNvSpPr>
+          <ns0:nvPr>
+            <ns0:ph type="body" idx="1"/>
+          </ns0:nvPr>
+        </ns0:nvSpPr>
+        <ns0:spPr/>
+        <ns0:txBody>
+          <ns1:bodyPr/>
+          <ns1:lstStyle/>
+          <ns1:p>
+            <ns1:r>
+              <ns1:t/>
+            </ns1:r>
+          </ns1:p>
+          <ns1:p>
+            <ns1:r>
+              <ns1:t/>
+            </ns1:r>
+          </ns1:p>
+          <ns1:p>
+            <ns1:r>
+              <ns1:t/>
+            </ns1:r>
+          </ns1:p>
+          <ns1:p>
+            <ns1:r>
+              <ns1:t/>
+            </ns1:r>
+          </ns1:p>
+          <ns1:p>
+            <ns1:r>
+              <ns1:t/>
+            </ns1:r>
+          </ns1:p>
+          <ns1:p>
+            <ns1:r>
+              <ns1:t/>
+            </ns1:r>
+          </ns1:p>
+          <ns1:p>
+            <ns1:r>
+              <ns1:t/>
+            </ns1:r>
+          </ns1:p>
+          <ns1:p>
+            <ns1:r>
+              <ns1:t/>
+            </ns1:r>
+          </ns1:p>
+          <ns1:p>
+            <ns1:r>
+              <ns1:t/>
+            </ns1:r>
+          </ns1:p>
+          <ns1:p>
+            <ns1:r>
+              <ns1:t/>
+            </ns1:r>
+          </ns1:p>
+          <ns1:p>
+            <ns1:r>
+              <ns1:t/>
+            </ns1:r>
+          </ns1:p>
+          <ns1:p>
+            <ns1:r>
+              <ns1:t/>
+            </ns1:r>
+          </ns1:p>
+          <ns1:p>
+            <ns1:r>
+              <ns1:t/>
+            </ns1:r>
+          </ns1:p>
+          <ns1:p>
+            <ns1:r>
+              <ns1:t/>
+            </ns1:r>
+          </ns1:p>
+          <ns1:p>
+            <ns1:r>
+              <ns1:t/>
+            </ns1:r>
+          </ns1:p>
+        </ns0:txBody>
+      </ns0:sp>
+      <ns0:sp>
+        <ns0:nvSpPr>
+          <ns0:cNvPr id="4" name="Slide Number Placeholder 3"/>
+          <ns0:cNvSpPr>
+            <ns1:spLocks noGrp="1"/>
+          </ns0:cNvSpPr>
+          <ns0:nvPr>
+            <ns0:ph type="sldNum" idx="5"/>
+          </ns0:nvPr>
+        </ns0:nvSpPr>
+        <ns0:spPr/>
+        <ns0:txBody>
+          <ns1:bodyPr/>
+          <ns1:lstStyle/>
+          <ns1:p/>
+        </ns0:txBody>
+      </ns0:sp>
+    </ns0:spTree>
+  </ns0:cSld>
+  <ns0:clrMapOvr>
+    <ns1:masterClrMapping/>
+  </ns0:clrMapOvr>
+</ns0:notes>
 </file>
 
 <file path=ppt/notesSlides/notesSlide3.xml><?xml version="1.0" encoding="utf-8"?>
-<p:notes xmlns:p="http://schemas.openxmlformats.org/presentationml/2006/main">
-  <p:cSld>
-    <p:spTree>
-      <p:nvGrpSpPr>
-        <p:cNvPr id="1" name=""/>
-        <p:cNvGrpSpPr/>
-        <p:nvPr/>
-      </p:nvGrpSpPr>
-      <p:grpSpPr>
-        <a:xfrm xmlns:a="http://schemas.openxmlformats.org/drawingml/2006/main"/>
-      </p:grpSpPr>
-      <p:sp>
-        <p:nvSpPr>
-          <p:cNvPr id="2" name="Slide Image Placeholder 1"/>
-          <p:cNvSpPr>
-            <a:spLocks xmlns:a="http://schemas.openxmlformats.org/drawingml/2006/main" noGrp="1"/>
-          </p:cNvSpPr>
-          <p:nvPr>
-            <p:ph type="sldImg" idx="0"/>
-          </p:nvPr>
-        </p:nvSpPr>
-        <p:spPr/>
-      </p:sp>
-      <p:sp>
-        <p:nvSpPr>
-          <p:cNvPr id="3" name="Notes Placeholder 2"/>
-          <p:cNvSpPr>
-            <a:spLocks xmlns:a="http://schemas.openxmlformats.org/drawingml/2006/main" noGrp="1"/>
-          </p:cNvSpPr>
-          <p:nvPr>
-            <p:ph type="body" idx="1"/>
-          </p:nvPr>
-        </p:nvSpPr>
-        <p:spPr/>
-        <p:txBody>
-          <a:bodyPr xmlns:a="http://schemas.openxmlformats.org/drawingml/2006/main"/>
-          <a:lstStyle xmlns:a="http://schemas.openxmlformats.org/drawingml/2006/main"/>
-          <a:p xmlns:a="http://schemas.openxmlformats.org/drawingml/2006/main">
-            <a:r>
-              <a:t>[목표 60초]</a:t>
-            </a:r>
-          </a:p>
-          <a:p xmlns:a="http://schemas.openxmlformats.org/drawingml/2006/main">
-            <a:r>
-              <a:t/>
-            </a:r>
-          </a:p>
-          <a:p xmlns:a="http://schemas.openxmlformats.org/drawingml/2006/main">
-            <a:r>
-              <a:t>항공권이나 숙소 확인 메일을 올리면 날짜, 시간, 장소를 예약으로 정리합니다. 한 메일에 예약이 여러 개 있거나 왕복 항공편이 들어 있어도 나눠서 보관합니다. AI가 잘못 읽은 부분은 제가 직접 수정할 수 있고, 수정한 값은 다시 분석하더라도 따로 유지합니다.</a:t>
-            </a:r>
-          </a:p>
-          <a:p xmlns:a="http://schemas.openxmlformats.org/drawingml/2006/main">
-            <a:r>
-              <a:t/>
-            </a:r>
-          </a:p>
-          <a:p xmlns:a="http://schemas.openxmlformats.org/drawingml/2006/main">
-            <a:r>
-              <a:t>메일 분석에는 OpenAI의 gpt-5-mini를 사용하고, 본문 검색에는 text-embedding-3-small을 사용합니다. 분석이 실패했다고 이전 예약을 지우지는 않습니다. 새로고침해도 어디까지 처리됐는지 다시 확인할 수 있습니다.</a:t>
-            </a:r>
-          </a:p>
-          <a:p xmlns:a="http://schemas.openxmlformats.org/drawingml/2006/main">
-            <a:r>
-              <a:t/>
-            </a:r>
-          </a:p>
-          <a:p xmlns:a="http://schemas.openxmlformats.org/drawingml/2006/main">
-            <a:r>
-              <a:t>정리가 끝나면 ‘2일차 예약을 전부 알려줘’처럼 물어볼 수 있습니다. 이런 질문은 날짜에 해당하는 예약을 모두 가져옵니다. 반면 환불 규정 같은 질문은 메일 본문을 검색하고 근거를 보여줍니다. 답변만 보고 넘어가기보다 원문을 직접 확인할 수 있게 했습니다.</a:t>
-            </a:r>
-          </a:p>
-          <a:p xmlns:a="http://schemas.openxmlformats.org/drawingml/2006/main">
-            <a:r>
-              <a:t/>
-            </a:r>
-          </a:p>
-          <a:p xmlns:a="http://schemas.openxmlformats.org/drawingml/2006/main">
-            <a:r>
-              <a:t>화면 안내: 메일 업로드 화면을 보여주며 질문 예시를 읽습니다.</a:t>
-            </a:r>
-          </a:p>
-          <a:p xmlns:a="http://schemas.openxmlformats.org/drawingml/2006/main">
-            <a:r>
-              <a:t/>
-            </a:r>
-          </a:p>
-          <a:p xmlns:a="http://schemas.openxmlformats.org/drawingml/2006/main">
-            <a:r>
-              <a:t>낭독하지 않음</a:t>
-            </a:r>
-          </a:p>
-          <a:p xmlns:a="http://schemas.openxmlformats.org/drawingml/2006/main">
-            <a:r>
-              <a:t>코드·기능: https://github.com/Jin-s-work/Travel-Agent</a:t>
-            </a:r>
-          </a:p>
-          <a:p xmlns:a="http://schemas.openxmlformats.org/drawingml/2006/main">
-            <a:r>
-              <a:t>모델과 수식: docs/service-v4/RECOMMENDATION_MODEL.md</a:t>
-            </a:r>
-          </a:p>
-          <a:p xmlns:a="http://schemas.openxmlformats.org/drawingml/2006/main">
-            <a:r>
-              <a:t>합성 개발 평가: docs/service-v4/reports/hybrid-v4-benchmark.md (실제 정확도·만족도 미측정)</a:t>
-            </a:r>
-          </a:p>
-          <a:p xmlns:a="http://schemas.openxmlformats.org/drawingml/2006/main">
-            <a:r>
-              <a:t>화면·사진: docs/presentation/CREDITS.md (2026-10-07 기존 합성 계정 화면). 엄격 언어 추천은 실제 품질 검증 전 OFF.</a:t>
-            </a:r>
-          </a:p>
-        </p:txBody>
-      </p:sp>
-      <p:sp>
-        <p:nvSpPr>
-          <p:cNvPr id="4" name="Slide Number Placeholder 3"/>
-          <p:cNvSpPr>
-            <a:spLocks xmlns:a="http://schemas.openxmlformats.org/drawingml/2006/main" noGrp="1"/>
-          </p:cNvSpPr>
-          <p:nvPr>
-            <p:ph type="sldNum" idx="5"/>
-          </p:nvPr>
-        </p:nvSpPr>
-        <p:spPr/>
-        <p:txBody>
-          <a:bodyPr xmlns:a="http://schemas.openxmlformats.org/drawingml/2006/main"/>
-          <a:lstStyle xmlns:a="http://schemas.openxmlformats.org/drawingml/2006/main"/>
-          <a:p xmlns:a="http://schemas.openxmlformats.org/drawingml/2006/main"/>
-        </p:txBody>
-      </p:sp>
-    </p:spTree>
-  </p:cSld>
-  <p:clrMapOvr>
-    <a:masterClrMapping xmlns:a="http://schemas.openxmlformats.org/drawingml/2006/main"/>
-  </p:clrMapOvr>
-</p:notes>
+<ns0:notes xmlns:ns0="http://schemas.openxmlformats.org/presentationml/2006/main" xmlns:ns1="http://schemas.openxmlformats.org/drawingml/2006/main">
+  <ns0:cSld>
+    <ns0:spTree>
+      <ns0:nvGrpSpPr>
+        <ns0:cNvPr id="1" name=""/>
+        <ns0:cNvGrpSpPr/>
+        <ns0:nvPr/>
+      </ns0:nvGrpSpPr>
+      <ns0:grpSpPr>
+        <ns1:xfrm/>
+      </ns0:grpSpPr>
+      <ns0:sp>
+        <ns0:nvSpPr>
+          <ns0:cNvPr id="2" name="Slide Image Placeholder 1"/>
+          <ns0:cNvSpPr>
+            <ns1:spLocks noGrp="1"/>
+          </ns0:cNvSpPr>
+          <ns0:nvPr>
+            <ns0:ph type="sldImg" idx="0"/>
+          </ns0:nvPr>
+        </ns0:nvSpPr>
+        <ns0:spPr/>
+      </ns0:sp>
+      <ns0:sp>
+        <ns0:nvSpPr>
+          <ns0:cNvPr id="3" name="Notes Placeholder 2"/>
+          <ns0:cNvSpPr>
+            <ns1:spLocks noGrp="1"/>
+          </ns0:cNvSpPr>
+          <ns0:nvPr>
+            <ns0:ph type="body" idx="1"/>
+          </ns0:nvPr>
+        </ns0:nvSpPr>
+        <ns0:spPr/>
+        <ns0:txBody>
+          <ns1:bodyPr/>
+          <ns1:lstStyle/>
+          <ns1:p>
+            <ns1:r>
+              <ns1:t/>
+            </ns1:r>
+          </ns1:p>
+          <ns1:p>
+            <ns1:r>
+              <ns1:t/>
+            </ns1:r>
+          </ns1:p>
+          <ns1:p>
+            <ns1:r>
+              <ns1:t/>
+            </ns1:r>
+          </ns1:p>
+          <ns1:p>
+            <ns1:r>
+              <ns1:t/>
+            </ns1:r>
+          </ns1:p>
+          <ns1:p>
+            <ns1:r>
+              <ns1:t/>
+            </ns1:r>
+          </ns1:p>
+          <ns1:p>
+            <ns1:r>
+              <ns1:t/>
+            </ns1:r>
+          </ns1:p>
+          <ns1:p>
+            <ns1:r>
+              <ns1:t/>
+            </ns1:r>
+          </ns1:p>
+          <ns1:p>
+            <ns1:r>
+              <ns1:t/>
+            </ns1:r>
+          </ns1:p>
+          <ns1:p>
+            <ns1:r>
+              <ns1:t/>
+            </ns1:r>
+          </ns1:p>
+          <ns1:p>
+            <ns1:r>
+              <ns1:t/>
+            </ns1:r>
+          </ns1:p>
+          <ns1:p>
+            <ns1:r>
+              <ns1:t/>
+            </ns1:r>
+          </ns1:p>
+          <ns1:p>
+            <ns1:r>
+              <ns1:t/>
+            </ns1:r>
+          </ns1:p>
+          <ns1:p>
+            <ns1:r>
+              <ns1:t/>
+            </ns1:r>
+          </ns1:p>
+          <ns1:p>
+            <ns1:r>
+              <ns1:t/>
+            </ns1:r>
+          </ns1:p>
+          <ns1:p>
+            <ns1:r>
+              <ns1:t/>
+            </ns1:r>
+          </ns1:p>
+        </ns0:txBody>
+      </ns0:sp>
+      <ns0:sp>
+        <ns0:nvSpPr>
+          <ns0:cNvPr id="4" name="Slide Number Placeholder 3"/>
+          <ns0:cNvSpPr>
+            <ns1:spLocks noGrp="1"/>
+          </ns0:cNvSpPr>
+          <ns0:nvPr>
+            <ns0:ph type="sldNum" idx="5"/>
+          </ns0:nvPr>
+        </ns0:nvSpPr>
+        <ns0:spPr/>
+        <ns0:txBody>
+          <ns1:bodyPr/>
+          <ns1:lstStyle/>
+          <ns1:p/>
+        </ns0:txBody>
+      </ns0:sp>
+    </ns0:spTree>
+  </ns0:cSld>
+  <ns0:clrMapOvr>
+    <ns1:masterClrMapping/>
+  </ns0:clrMapOvr>
+</ns0:notes>
 </file>
 
 <file path=ppt/notesSlides/notesSlide4.xml><?xml version="1.0" encoding="utf-8"?>
-<p:notes xmlns:p="http://schemas.openxmlformats.org/presentationml/2006/main">
-  <p:cSld>
-    <p:spTree>
-      <p:nvGrpSpPr>
-        <p:cNvPr id="1" name=""/>
-        <p:cNvGrpSpPr/>
-        <p:nvPr/>
-      </p:nvGrpSpPr>
-      <p:grpSpPr>
-        <a:xfrm xmlns:a="http://schemas.openxmlformats.org/drawingml/2006/main"/>
-      </p:grpSpPr>
-      <p:sp>
-        <p:nvSpPr>
-          <p:cNvPr id="2" name="Slide Image Placeholder 1"/>
-          <p:cNvSpPr>
-            <a:spLocks xmlns:a="http://schemas.openxmlformats.org/drawingml/2006/main" noGrp="1"/>
-          </p:cNvSpPr>
-          <p:nvPr>
-            <p:ph type="sldImg" idx="0"/>
-          </p:nvPr>
-        </p:nvSpPr>
-        <p:spPr/>
-      </p:sp>
-      <p:sp>
-        <p:nvSpPr>
-          <p:cNvPr id="3" name="Notes Placeholder 2"/>
-          <p:cNvSpPr>
-            <a:spLocks xmlns:a="http://schemas.openxmlformats.org/drawingml/2006/main" noGrp="1"/>
-          </p:cNvSpPr>
-          <p:nvPr>
-            <p:ph type="body" idx="1"/>
-          </p:nvPr>
-        </p:nvSpPr>
-        <p:spPr/>
-        <p:txBody>
-          <a:bodyPr xmlns:a="http://schemas.openxmlformats.org/drawingml/2006/main"/>
-          <a:lstStyle xmlns:a="http://schemas.openxmlformats.org/drawingml/2006/main"/>
-          <a:p xmlns:a="http://schemas.openxmlformats.org/drawingml/2006/main">
-            <a:r>
-              <a:t>[목표 65초]</a:t>
-            </a:r>
-          </a:p>
-          <a:p xmlns:a="http://schemas.openxmlformats.org/drawingml/2006/main">
-            <a:r>
-              <a:t/>
-            </a:r>
-          </a:p>
-          <a:p xmlns:a="http://schemas.openxmlformats.org/drawingml/2006/main">
-            <a:r>
-              <a:t>식당을 고를 때 저는 한국어 리뷰로 이미 많이 알려진 곳 외에도 찾아보고 싶었습니다. 그래서 현지어 원문 리뷰가 충분하고, 한국어가 적게 관측된 곳을 찾아보는 기능을 만들었습니다.</a:t>
-            </a:r>
-          </a:p>
-          <a:p xmlns:a="http://schemas.openxmlformats.org/drawingml/2006/main">
-            <a:r>
-              <a:t/>
-            </a:r>
-          </a:p>
-          <a:p xmlns:a="http://schemas.openxmlformats.org/drawingml/2006/main">
-            <a:r>
-              <a:t>여기서 주의한 점은 현지어로 썼다고 해서 현지 주민이라고 단정할 수는 없다는 겁니다. 여행객도 그 언어를 쓸 수 있으니까요. 그래서 화면에서는 현지인 비율이라고 쓰지 않고, 실제로 관측한 리뷰의 언어 구성을 보여주도록 했습니다. 언어를 판단하지 못한 리뷰도 빼버리지 않고 함께 계산합니다.</a:t>
-            </a:r>
-          </a:p>
-          <a:p xmlns:a="http://schemas.openxmlformats.org/drawingml/2006/main">
-            <a:r>
-              <a:t/>
-            </a:r>
-          </a:p>
-          <a:p xmlns:a="http://schemas.openxmlformats.org/drawingml/2006/main">
-            <a:r>
-              <a:t>반대로 여행지에 가면 누구나 아는 유명한 곳에 가보고 싶을 때도 있습니다. 그래서 공식적으로 소개된 명소나 평가가 많이 쌓인 식당을 찾는 ‘유명한 곳’을 별도로 뒀습니다. 음식점, 카페, 볼거리는 여기서 다시 선택합니다.</a:t>
-            </a:r>
-          </a:p>
-          <a:p xmlns:a="http://schemas.openxmlformats.org/drawingml/2006/main">
-            <a:r>
-              <a:t/>
-            </a:r>
-          </a:p>
-          <a:p xmlns:a="http://schemas.openxmlformats.org/drawingml/2006/main">
-            <a:r>
-              <a:t>엄격한 현지어 추천은 실제 리뷰의 이용 범위와 언어 품질 검증이 끝나기 전까지 꺼 두었습니다. 코드는 준비했지만, 실제 자료 검증까지 마쳤다고 소개하지는 않으려고 합니다.</a:t>
-            </a:r>
-          </a:p>
-          <a:p xmlns:a="http://schemas.openxmlformats.org/drawingml/2006/main">
-            <a:r>
-              <a:t/>
-            </a:r>
-          </a:p>
-          <a:p xmlns:a="http://schemas.openxmlformats.org/drawingml/2006/main">
-            <a:r>
-              <a:t>화면 안내: 왼쪽은 언어 관측, 오른쪽은 공식·인기 근거라는 차이를 설명합니다.</a:t>
-            </a:r>
-          </a:p>
-          <a:p xmlns:a="http://schemas.openxmlformats.org/drawingml/2006/main">
-            <a:r>
-              <a:t/>
-            </a:r>
-          </a:p>
-          <a:p xmlns:a="http://schemas.openxmlformats.org/drawingml/2006/main">
-            <a:r>
-              <a:t>낭독하지 않음</a:t>
-            </a:r>
-          </a:p>
-          <a:p xmlns:a="http://schemas.openxmlformats.org/drawingml/2006/main">
-            <a:r>
-              <a:t>코드·기능: https://github.com/Jin-s-work/Travel-Agent</a:t>
-            </a:r>
-          </a:p>
-          <a:p xmlns:a="http://schemas.openxmlformats.org/drawingml/2006/main">
-            <a:r>
-              <a:t>모델과 수식: docs/service-v4/RECOMMENDATION_MODEL.md</a:t>
-            </a:r>
-          </a:p>
-          <a:p xmlns:a="http://schemas.openxmlformats.org/drawingml/2006/main">
-            <a:r>
-              <a:t>합성 개발 평가: docs/service-v4/reports/hybrid-v4-benchmark.md (실제 정확도·만족도 미측정)</a:t>
-            </a:r>
-          </a:p>
-          <a:p xmlns:a="http://schemas.openxmlformats.org/drawingml/2006/main">
-            <a:r>
-              <a:t>화면·사진: docs/presentation/CREDITS.md (2026-10-07 기존 합성 계정 화면). 엄격 언어 추천은 실제 품질 검증 전 OFF.</a:t>
-            </a:r>
-          </a:p>
-        </p:txBody>
-      </p:sp>
-      <p:sp>
-        <p:nvSpPr>
-          <p:cNvPr id="4" name="Slide Number Placeholder 3"/>
-          <p:cNvSpPr>
-            <a:spLocks xmlns:a="http://schemas.openxmlformats.org/drawingml/2006/main" noGrp="1"/>
-          </p:cNvSpPr>
-          <p:nvPr>
-            <p:ph type="sldNum" idx="5"/>
-          </p:nvPr>
-        </p:nvSpPr>
-        <p:spPr/>
-        <p:txBody>
-          <a:bodyPr xmlns:a="http://schemas.openxmlformats.org/drawingml/2006/main"/>
-          <a:lstStyle xmlns:a="http://schemas.openxmlformats.org/drawingml/2006/main"/>
-          <a:p xmlns:a="http://schemas.openxmlformats.org/drawingml/2006/main"/>
-        </p:txBody>
-      </p:sp>
-    </p:spTree>
-  </p:cSld>
-  <p:clrMapOvr>
-    <a:masterClrMapping xmlns:a="http://schemas.openxmlformats.org/drawingml/2006/main"/>
-  </p:clrMapOvr>
-</p:notes>
+<ns0:notes xmlns:ns0="http://schemas.openxmlformats.org/presentationml/2006/main" xmlns:ns1="http://schemas.openxmlformats.org/drawingml/2006/main">
+  <ns0:cSld>
+    <ns0:spTree>
+      <ns0:nvGrpSpPr>
+        <ns0:cNvPr id="1" name=""/>
+        <ns0:cNvGrpSpPr/>
+        <ns0:nvPr/>
+      </ns0:nvGrpSpPr>
+      <ns0:grpSpPr>
+        <ns1:xfrm/>
+      </ns0:grpSpPr>
+      <ns0:sp>
+        <ns0:nvSpPr>
+          <ns0:cNvPr id="2" name="Slide Image Placeholder 1"/>
+          <ns0:cNvSpPr>
+            <ns1:spLocks noGrp="1"/>
+          </ns0:cNvSpPr>
+          <ns0:nvPr>
+            <ns0:ph type="sldImg" idx="0"/>
+          </ns0:nvPr>
+        </ns0:nvSpPr>
+        <ns0:spPr/>
+      </ns0:sp>
+      <ns0:sp>
+        <ns0:nvSpPr>
+          <ns0:cNvPr id="3" name="Notes Placeholder 2"/>
+          <ns0:cNvSpPr>
+            <ns1:spLocks noGrp="1"/>
+          </ns0:cNvSpPr>
+          <ns0:nvPr>
+            <ns0:ph type="body" idx="1"/>
+          </ns0:nvPr>
+        </ns0:nvSpPr>
+        <ns0:spPr/>
+        <ns0:txBody>
+          <ns1:bodyPr/>
+          <ns1:lstStyle/>
+          <ns1:p>
+            <ns1:r>
+              <ns1:t/>
+            </ns1:r>
+          </ns1:p>
+          <ns1:p>
+            <ns1:r>
+              <ns1:t/>
+            </ns1:r>
+          </ns1:p>
+          <ns1:p>
+            <ns1:r>
+              <ns1:t/>
+            </ns1:r>
+          </ns1:p>
+          <ns1:p>
+            <ns1:r>
+              <ns1:t/>
+            </ns1:r>
+          </ns1:p>
+          <ns1:p>
+            <ns1:r>
+              <ns1:t/>
+            </ns1:r>
+          </ns1:p>
+          <ns1:p>
+            <ns1:r>
+              <ns1:t/>
+            </ns1:r>
+          </ns1:p>
+          <ns1:p>
+            <ns1:r>
+              <ns1:t/>
+            </ns1:r>
+          </ns1:p>
+          <ns1:p>
+            <ns1:r>
+              <ns1:t/>
+            </ns1:r>
+          </ns1:p>
+          <ns1:p>
+            <ns1:r>
+              <ns1:t/>
+            </ns1:r>
+          </ns1:p>
+          <ns1:p>
+            <ns1:r>
+              <ns1:t/>
+            </ns1:r>
+          </ns1:p>
+          <ns1:p>
+            <ns1:r>
+              <ns1:t/>
+            </ns1:r>
+          </ns1:p>
+          <ns1:p>
+            <ns1:r>
+              <ns1:t/>
+            </ns1:r>
+          </ns1:p>
+          <ns1:p>
+            <ns1:r>
+              <ns1:t/>
+            </ns1:r>
+          </ns1:p>
+          <ns1:p>
+            <ns1:r>
+              <ns1:t/>
+            </ns1:r>
+          </ns1:p>
+          <ns1:p>
+            <ns1:r>
+              <ns1:t/>
+            </ns1:r>
+          </ns1:p>
+          <ns1:p>
+            <ns1:r>
+              <ns1:t/>
+            </ns1:r>
+          </ns1:p>
+          <ns1:p>
+            <ns1:r>
+              <ns1:t/>
+            </ns1:r>
+          </ns1:p>
+        </ns0:txBody>
+      </ns0:sp>
+      <ns0:sp>
+        <ns0:nvSpPr>
+          <ns0:cNvPr id="4" name="Slide Number Placeholder 3"/>
+          <ns0:cNvSpPr>
+            <ns1:spLocks noGrp="1"/>
+          </ns0:cNvSpPr>
+          <ns0:nvPr>
+            <ns0:ph type="sldNum" idx="5"/>
+          </ns0:nvPr>
+        </ns0:nvSpPr>
+        <ns0:spPr/>
+        <ns0:txBody>
+          <ns1:bodyPr/>
+          <ns1:lstStyle/>
+          <ns1:p/>
+        </ns0:txBody>
+      </ns0:sp>
+    </ns0:spTree>
+  </ns0:cSld>
+  <ns0:clrMapOvr>
+    <ns1:masterClrMapping/>
+  </ns0:clrMapOvr>
+</ns0:notes>
 </file>
 
 <file path=ppt/notesSlides/notesSlide5.xml><?xml version="1.0" encoding="utf-8"?>
-<p:notes xmlns:p="http://schemas.openxmlformats.org/presentationml/2006/main">
-  <p:cSld>
-    <p:spTree>
-      <p:nvGrpSpPr>
-        <p:cNvPr id="1" name=""/>
-        <p:cNvGrpSpPr/>
-        <p:nvPr/>
-      </p:nvGrpSpPr>
-      <p:grpSpPr>
-        <a:xfrm xmlns:a="http://schemas.openxmlformats.org/drawingml/2006/main"/>
-      </p:grpSpPr>
-      <p:sp>
-        <p:nvSpPr>
-          <p:cNvPr id="2" name="Slide Image Placeholder 1"/>
-          <p:cNvSpPr>
-            <a:spLocks xmlns:a="http://schemas.openxmlformats.org/drawingml/2006/main" noGrp="1"/>
-          </p:cNvSpPr>
-          <p:nvPr>
-            <p:ph type="sldImg" idx="0"/>
-          </p:nvPr>
-        </p:nvSpPr>
-        <p:spPr/>
-      </p:sp>
-      <p:sp>
-        <p:nvSpPr>
-          <p:cNvPr id="3" name="Notes Placeholder 2"/>
-          <p:cNvSpPr>
-            <a:spLocks xmlns:a="http://schemas.openxmlformats.org/drawingml/2006/main" noGrp="1"/>
-          </p:cNvSpPr>
-          <p:nvPr>
-            <p:ph type="body" idx="1"/>
-          </p:nvPr>
-        </p:nvSpPr>
-        <p:spPr/>
-        <p:txBody>
-          <a:bodyPr xmlns:a="http://schemas.openxmlformats.org/drawingml/2006/main"/>
-          <a:lstStyle xmlns:a="http://schemas.openxmlformats.org/drawingml/2006/main"/>
-          <a:p xmlns:a="http://schemas.openxmlformats.org/drawingml/2006/main">
-            <a:r>
-              <a:t>[목표 45초]</a:t>
-            </a:r>
-          </a:p>
-          <a:p xmlns:a="http://schemas.openxmlformats.org/drawingml/2006/main">
-            <a:r>
-              <a:t/>
-            </a:r>
-          </a:p>
-          <a:p xmlns:a="http://schemas.openxmlformats.org/drawingml/2006/main">
-            <a:r>
-              <a:t>결과에서는 이름만 나열하기보다 사진과 추천 이유를 먼저 볼 수 있습니다. 사진은 이용 권한과 지점을 확인한 자료가 있을 때 최대 세 장까지 보여줍니다. 모든 식당에 사진이 있는 것은 아닙니다.</a:t>
-            </a:r>
-          </a:p>
-          <a:p xmlns:a="http://schemas.openxmlformats.org/drawingml/2006/main">
-            <a:r>
-              <a:t/>
-            </a:r>
-          </a:p>
-          <a:p xmlns:a="http://schemas.openxmlformats.org/drawingml/2006/main">
-            <a:r>
-              <a:t>장소를 열면 영업시간, 예약 방법, 가격을 보고 그 정보의 출처도 확인할 수 있습니다. 마음에 들면 보관함에 저장하고, 같은 날짜와 인원 조건으로 세 곳까지 비교할 수 있습니다.</a:t>
-            </a:r>
-          </a:p>
-          <a:p xmlns:a="http://schemas.openxmlformats.org/drawingml/2006/main">
-            <a:r>
-              <a:t/>
-            </a:r>
-          </a:p>
-          <a:p xmlns:a="http://schemas.openxmlformats.org/drawingml/2006/main">
-            <a:r>
-              <a:t>숙소 위치를 확인했다면 거리도 같이 봅니다. 다만 지도상의 직선거리와 실제 도보시간은 다르기 때문에 구분해서 표시합니다. 예약 가능 여부처럼 확인하지 못한 것은 가능하다고 채우지 않고, 방문 전에 확인할 항목으로 남깁니다.</a:t>
-            </a:r>
-          </a:p>
-          <a:p xmlns:a="http://schemas.openxmlformats.org/drawingml/2006/main">
-            <a:r>
-              <a:t/>
-            </a:r>
-          </a:p>
-          <a:p xmlns:a="http://schemas.openxmlformats.org/drawingml/2006/main">
-            <a:r>
-              <a:t>화면 안내: 사진, 추천 이유, 확인 필요 항목이 있는 실제 장소 화면을 가리킵니다.</a:t>
-            </a:r>
-          </a:p>
-          <a:p xmlns:a="http://schemas.openxmlformats.org/drawingml/2006/main">
-            <a:r>
-              <a:t/>
-            </a:r>
-          </a:p>
-          <a:p xmlns:a="http://schemas.openxmlformats.org/drawingml/2006/main">
-            <a:r>
-              <a:t>낭독하지 않음</a:t>
-            </a:r>
-          </a:p>
-          <a:p xmlns:a="http://schemas.openxmlformats.org/drawingml/2006/main">
-            <a:r>
-              <a:t>코드·기능: https://github.com/Jin-s-work/Travel-Agent</a:t>
-            </a:r>
-          </a:p>
-          <a:p xmlns:a="http://schemas.openxmlformats.org/drawingml/2006/main">
-            <a:r>
-              <a:t>모델과 수식: docs/service-v4/RECOMMENDATION_MODEL.md</a:t>
-            </a:r>
-          </a:p>
-          <a:p xmlns:a="http://schemas.openxmlformats.org/drawingml/2006/main">
-            <a:r>
-              <a:t>합성 개발 평가: docs/service-v4/reports/hybrid-v4-benchmark.md (실제 정확도·만족도 미측정)</a:t>
-            </a:r>
-          </a:p>
-          <a:p xmlns:a="http://schemas.openxmlformats.org/drawingml/2006/main">
-            <a:r>
-              <a:t>화면·사진: docs/presentation/CREDITS.md (2026-10-07 기존 합성 계정 화면). 엄격 언어 추천은 실제 품질 검증 전 OFF.</a:t>
-            </a:r>
-          </a:p>
-        </p:txBody>
-      </p:sp>
-      <p:sp>
-        <p:nvSpPr>
-          <p:cNvPr id="4" name="Slide Number Placeholder 3"/>
-          <p:cNvSpPr>
-            <a:spLocks xmlns:a="http://schemas.openxmlformats.org/drawingml/2006/main" noGrp="1"/>
-          </p:cNvSpPr>
-          <p:nvPr>
-            <p:ph type="sldNum" idx="5"/>
-          </p:nvPr>
-        </p:nvSpPr>
-        <p:spPr/>
-        <p:txBody>
-          <a:bodyPr xmlns:a="http://schemas.openxmlformats.org/drawingml/2006/main"/>
-          <a:lstStyle xmlns:a="http://schemas.openxmlformats.org/drawingml/2006/main"/>
-          <a:p xmlns:a="http://schemas.openxmlformats.org/drawingml/2006/main"/>
-        </p:txBody>
-      </p:sp>
-    </p:spTree>
-  </p:cSld>
-  <p:clrMapOvr>
-    <a:masterClrMapping xmlns:a="http://schemas.openxmlformats.org/drawingml/2006/main"/>
-  </p:clrMapOvr>
-</p:notes>
+<ns0:notes xmlns:ns0="http://schemas.openxmlformats.org/presentationml/2006/main" xmlns:ns1="http://schemas.openxmlformats.org/drawingml/2006/main">
+  <ns0:cSld>
+    <ns0:spTree>
+      <ns0:nvGrpSpPr>
+        <ns0:cNvPr id="1" name=""/>
+        <ns0:cNvGrpSpPr/>
+        <ns0:nvPr/>
+      </ns0:nvGrpSpPr>
+      <ns0:grpSpPr>
+        <ns1:xfrm/>
+      </ns0:grpSpPr>
+      <ns0:sp>
+        <ns0:nvSpPr>
+          <ns0:cNvPr id="2" name="Slide Image Placeholder 1"/>
+          <ns0:cNvSpPr>
+            <ns1:spLocks noGrp="1"/>
+          </ns0:cNvSpPr>
+          <ns0:nvPr>
+            <ns0:ph type="sldImg" idx="0"/>
+          </ns0:nvPr>
+        </ns0:nvSpPr>
+        <ns0:spPr/>
+      </ns0:sp>
+      <ns0:sp>
+        <ns0:nvSpPr>
+          <ns0:cNvPr id="3" name="Notes Placeholder 2"/>
+          <ns0:cNvSpPr>
+            <ns1:spLocks noGrp="1"/>
+          </ns0:cNvSpPr>
+          <ns0:nvPr>
+            <ns0:ph type="body" idx="1"/>
+          </ns0:nvPr>
+        </ns0:nvSpPr>
+        <ns0:spPr/>
+        <ns0:txBody>
+          <ns1:bodyPr/>
+          <ns1:lstStyle/>
+          <ns1:p>
+            <ns1:r>
+              <ns1:t/>
+            </ns1:r>
+          </ns1:p>
+          <ns1:p>
+            <ns1:r>
+              <ns1:t/>
+            </ns1:r>
+          </ns1:p>
+          <ns1:p>
+            <ns1:r>
+              <ns1:t/>
+            </ns1:r>
+          </ns1:p>
+          <ns1:p>
+            <ns1:r>
+              <ns1:t/>
+            </ns1:r>
+          </ns1:p>
+          <ns1:p>
+            <ns1:r>
+              <ns1:t/>
+            </ns1:r>
+          </ns1:p>
+          <ns1:p>
+            <ns1:r>
+              <ns1:t/>
+            </ns1:r>
+          </ns1:p>
+          <ns1:p>
+            <ns1:r>
+              <ns1:t/>
+            </ns1:r>
+          </ns1:p>
+          <ns1:p>
+            <ns1:r>
+              <ns1:t/>
+            </ns1:r>
+          </ns1:p>
+          <ns1:p>
+            <ns1:r>
+              <ns1:t/>
+            </ns1:r>
+          </ns1:p>
+          <ns1:p>
+            <ns1:r>
+              <ns1:t/>
+            </ns1:r>
+          </ns1:p>
+          <ns1:p>
+            <ns1:r>
+              <ns1:t/>
+            </ns1:r>
+          </ns1:p>
+          <ns1:p>
+            <ns1:r>
+              <ns1:t/>
+            </ns1:r>
+          </ns1:p>
+          <ns1:p>
+            <ns1:r>
+              <ns1:t/>
+            </ns1:r>
+          </ns1:p>
+          <ns1:p>
+            <ns1:r>
+              <ns1:t/>
+            </ns1:r>
+          </ns1:p>
+          <ns1:p>
+            <ns1:r>
+              <ns1:t/>
+            </ns1:r>
+          </ns1:p>
+        </ns0:txBody>
+      </ns0:sp>
+      <ns0:sp>
+        <ns0:nvSpPr>
+          <ns0:cNvPr id="4" name="Slide Number Placeholder 3"/>
+          <ns0:cNvSpPr>
+            <ns1:spLocks noGrp="1"/>
+          </ns0:cNvSpPr>
+          <ns0:nvPr>
+            <ns0:ph type="sldNum" idx="5"/>
+          </ns0:nvPr>
+        </ns0:nvSpPr>
+        <ns0:spPr/>
+        <ns0:txBody>
+          <ns1:bodyPr/>
+          <ns1:lstStyle/>
+          <ns1:p/>
+        </ns0:txBody>
+      </ns0:sp>
+    </ns0:spTree>
+  </ns0:cSld>
+  <ns0:clrMapOvr>
+    <ns1:masterClrMapping/>
+  </ns0:clrMapOvr>
+</ns0:notes>
 </file>
 
 <file path=ppt/notesSlides/notesSlide6.xml><?xml version="1.0" encoding="utf-8"?>
-<p:notes xmlns:p="http://schemas.openxmlformats.org/presentationml/2006/main">
-  <p:cSld>
-    <p:spTree>
-      <p:nvGrpSpPr>
-        <p:cNvPr id="1" name=""/>
-        <p:cNvGrpSpPr/>
-        <p:nvPr/>
-      </p:nvGrpSpPr>
-      <p:grpSpPr>
-        <a:xfrm xmlns:a="http://schemas.openxmlformats.org/drawingml/2006/main"/>
-      </p:grpSpPr>
-      <p:sp>
-        <p:nvSpPr>
-          <p:cNvPr id="2" name="Slide Image Placeholder 1"/>
-          <p:cNvSpPr>
-            <a:spLocks xmlns:a="http://schemas.openxmlformats.org/drawingml/2006/main" noGrp="1"/>
-          </p:cNvSpPr>
-          <p:nvPr>
-            <p:ph type="sldImg" idx="0"/>
-          </p:nvPr>
-        </p:nvSpPr>
-        <p:spPr/>
-      </p:sp>
-      <p:sp>
-        <p:nvSpPr>
-          <p:cNvPr id="3" name="Notes Placeholder 2"/>
-          <p:cNvSpPr>
-            <a:spLocks xmlns:a="http://schemas.openxmlformats.org/drawingml/2006/main" noGrp="1"/>
-          </p:cNvSpPr>
-          <p:nvPr>
-            <p:ph type="body" idx="1"/>
-          </p:nvPr>
-        </p:nvSpPr>
-        <p:spPr/>
-        <p:txBody>
-          <a:bodyPr xmlns:a="http://schemas.openxmlformats.org/drawingml/2006/main"/>
-          <a:lstStyle xmlns:a="http://schemas.openxmlformats.org/drawingml/2006/main"/>
-          <a:p xmlns:a="http://schemas.openxmlformats.org/drawingml/2006/main">
-            <a:r>
-              <a:t>[목표 65초]</a:t>
-            </a:r>
-          </a:p>
-          <a:p xmlns:a="http://schemas.openxmlformats.org/drawingml/2006/main">
-            <a:r>
-              <a:t/>
-            </a:r>
-          </a:p>
-          <a:p xmlns:a="http://schemas.openxmlformats.org/drawingml/2006/main">
-            <a:r>
-              <a:t>처음에는 리뷰 비율이나 평가 수를 기준으로 순서를 정했습니다. 그런데 초밥을 좋아한다고 입력해도 그 취향이 순위에 충분히 반영되지 않는 문제가 있었습니다.</a:t>
-            </a:r>
-          </a:p>
-          <a:p xmlns:a="http://schemas.openxmlformats.org/drawingml/2006/main">
-            <a:r>
-              <a:t/>
-            </a:r>
-          </a:p>
-          <a:p xmlns:a="http://schemas.openxmlformats.org/drawingml/2006/main">
-            <a:r>
-              <a:t>지금은 콘텐츠 기반 추천 모델을 사용합니다. 사용자가 고른 취향과 장소의 태그를 TF-IDF라는 벡터로 만들고, 코사인 유사도로 얼마나 가까운지 계산합니다. 예를 들어 초밥과 스시처럼 연결할 수 있는 태그는 작은 사전으로 정리했습니다.</a:t>
-            </a:r>
-          </a:p>
-          <a:p xmlns:a="http://schemas.openxmlformats.org/drawingml/2006/main">
-            <a:r>
-              <a:t/>
-            </a:r>
-          </a:p>
-          <a:p xmlns:a="http://schemas.openxmlformats.org/drawingml/2006/main">
-            <a:r>
-              <a:t>평점도 그대로만 비교하지 않습니다. 평가 한 건의 5점과 수백 건의 4.8점은 다르기 때문에, 평가가 적은 장소는 같은 플랫폼과 도시의 평균 쪽으로 보정합니다. 여기에 숙소 등 출발점과의 거리도 반영합니다.</a:t>
-            </a:r>
-          </a:p>
-          <a:p xmlns:a="http://schemas.openxmlformats.org/drawingml/2006/main">
-            <a:r>
-              <a:t/>
-            </a:r>
-          </a:p>
-          <a:p xmlns:a="http://schemas.openxmlformats.org/drawingml/2006/main">
-            <a:r>
-              <a:t>취향과 출발점이 모두 있으면 기본 근거 40, 취향 40, 거리 20의 비중을 씁니다. 이 비중은 아직 초기 설정입니다. 사용자 행동을 학습한 모델은 아니고, 선택한 조건과 장소 정보를 계산하는 방식입니다. 또 휴무나 인원 조건을 위반한 곳은 점수가 높아도 먼저 제외합니다.</a:t>
-            </a:r>
-          </a:p>
-          <a:p xmlns:a="http://schemas.openxmlformats.org/drawingml/2006/main">
-            <a:r>
-              <a:t/>
-            </a:r>
-          </a:p>
-          <a:p xmlns:a="http://schemas.openxmlformats.org/drawingml/2006/main">
-            <a:r>
-              <a:t>화면 안내: 취향 → 평점 → 거리 순으로 설명하고 필수 조건 문구를 짚습니다.</a:t>
-            </a:r>
-          </a:p>
-          <a:p xmlns:a="http://schemas.openxmlformats.org/drawingml/2006/main">
-            <a:r>
-              <a:t/>
-            </a:r>
-          </a:p>
-          <a:p xmlns:a="http://schemas.openxmlformats.org/drawingml/2006/main">
-            <a:r>
-              <a:t>낭독하지 않음</a:t>
-            </a:r>
-          </a:p>
-          <a:p xmlns:a="http://schemas.openxmlformats.org/drawingml/2006/main">
-            <a:r>
-              <a:t>코드·기능: https://github.com/Jin-s-work/Travel-Agent</a:t>
-            </a:r>
-          </a:p>
-          <a:p xmlns:a="http://schemas.openxmlformats.org/drawingml/2006/main">
-            <a:r>
-              <a:t>모델과 수식: docs/service-v4/RECOMMENDATION_MODEL.md</a:t>
-            </a:r>
-          </a:p>
-          <a:p xmlns:a="http://schemas.openxmlformats.org/drawingml/2006/main">
-            <a:r>
-              <a:t>합성 개발 평가: docs/service-v4/reports/hybrid-v4-benchmark.md (실제 정확도·만족도 미측정)</a:t>
-            </a:r>
-          </a:p>
-          <a:p xmlns:a="http://schemas.openxmlformats.org/drawingml/2006/main">
-            <a:r>
-              <a:t>화면·사진: docs/presentation/CREDITS.md (2026-10-07 기존 합성 계정 화면). 엄격 언어 추천은 실제 품질 검증 전 OFF.</a:t>
-            </a:r>
-          </a:p>
-        </p:txBody>
-      </p:sp>
-      <p:sp>
-        <p:nvSpPr>
-          <p:cNvPr id="4" name="Slide Number Placeholder 3"/>
-          <p:cNvSpPr>
-            <a:spLocks xmlns:a="http://schemas.openxmlformats.org/drawingml/2006/main" noGrp="1"/>
-          </p:cNvSpPr>
-          <p:nvPr>
-            <p:ph type="sldNum" idx="5"/>
-          </p:nvPr>
-        </p:nvSpPr>
-        <p:spPr/>
-        <p:txBody>
-          <a:bodyPr xmlns:a="http://schemas.openxmlformats.org/drawingml/2006/main"/>
-          <a:lstStyle xmlns:a="http://schemas.openxmlformats.org/drawingml/2006/main"/>
-          <a:p xmlns:a="http://schemas.openxmlformats.org/drawingml/2006/main"/>
-        </p:txBody>
-      </p:sp>
-    </p:spTree>
-  </p:cSld>
-  <p:clrMapOvr>
-    <a:masterClrMapping xmlns:a="http://schemas.openxmlformats.org/drawingml/2006/main"/>
-  </p:clrMapOvr>
-</p:notes>
+<ns0:notes xmlns:ns0="http://schemas.openxmlformats.org/presentationml/2006/main" xmlns:ns1="http://schemas.openxmlformats.org/drawingml/2006/main">
+  <ns0:cSld>
+    <ns0:spTree>
+      <ns0:nvGrpSpPr>
+        <ns0:cNvPr id="1" name=""/>
+        <ns0:cNvGrpSpPr/>
+        <ns0:nvPr/>
+      </ns0:nvGrpSpPr>
+      <ns0:grpSpPr>
+        <ns1:xfrm/>
+      </ns0:grpSpPr>
+      <ns0:sp>
+        <ns0:nvSpPr>
+          <ns0:cNvPr id="2" name="Slide Image Placeholder 1"/>
+          <ns0:cNvSpPr>
+            <ns1:spLocks noGrp="1"/>
+          </ns0:cNvSpPr>
+          <ns0:nvPr>
+            <ns0:ph type="sldImg" idx="0"/>
+          </ns0:nvPr>
+        </ns0:nvSpPr>
+        <ns0:spPr/>
+      </ns0:sp>
+      <ns0:sp>
+        <ns0:nvSpPr>
+          <ns0:cNvPr id="3" name="Notes Placeholder 2"/>
+          <ns0:cNvSpPr>
+            <ns1:spLocks noGrp="1"/>
+          </ns0:cNvSpPr>
+          <ns0:nvPr>
+            <ns0:ph type="body" idx="1"/>
+          </ns0:nvPr>
+        </ns0:nvSpPr>
+        <ns0:spPr/>
+        <ns0:txBody>
+          <ns1:bodyPr/>
+          <ns1:lstStyle/>
+          <ns1:p>
+            <ns1:r>
+              <ns1:t/>
+            </ns1:r>
+          </ns1:p>
+          <ns1:p>
+            <ns1:r>
+              <ns1:t/>
+            </ns1:r>
+          </ns1:p>
+          <ns1:p>
+            <ns1:r>
+              <ns1:t/>
+            </ns1:r>
+          </ns1:p>
+          <ns1:p>
+            <ns1:r>
+              <ns1:t/>
+            </ns1:r>
+          </ns1:p>
+          <ns1:p>
+            <ns1:r>
+              <ns1:t/>
+            </ns1:r>
+          </ns1:p>
+          <ns1:p>
+            <ns1:r>
+              <ns1:t/>
+            </ns1:r>
+          </ns1:p>
+          <ns1:p>
+            <ns1:r>
+              <ns1:t/>
+            </ns1:r>
+          </ns1:p>
+          <ns1:p>
+            <ns1:r>
+              <ns1:t/>
+            </ns1:r>
+          </ns1:p>
+          <ns1:p>
+            <ns1:r>
+              <ns1:t/>
+            </ns1:r>
+          </ns1:p>
+          <ns1:p>
+            <ns1:r>
+              <ns1:t/>
+            </ns1:r>
+          </ns1:p>
+          <ns1:p>
+            <ns1:r>
+              <ns1:t/>
+            </ns1:r>
+          </ns1:p>
+          <ns1:p>
+            <ns1:r>
+              <ns1:t/>
+            </ns1:r>
+          </ns1:p>
+          <ns1:p>
+            <ns1:r>
+              <ns1:t/>
+            </ns1:r>
+          </ns1:p>
+          <ns1:p>
+            <ns1:r>
+              <ns1:t/>
+            </ns1:r>
+          </ns1:p>
+          <ns1:p>
+            <ns1:r>
+              <ns1:t/>
+            </ns1:r>
+          </ns1:p>
+          <ns1:p>
+            <ns1:r>
+              <ns1:t/>
+            </ns1:r>
+          </ns1:p>
+          <ns1:p>
+            <ns1:r>
+              <ns1:t/>
+            </ns1:r>
+          </ns1:p>
+        </ns0:txBody>
+      </ns0:sp>
+      <ns0:sp>
+        <ns0:nvSpPr>
+          <ns0:cNvPr id="4" name="Slide Number Placeholder 3"/>
+          <ns0:cNvSpPr>
+            <ns1:spLocks noGrp="1"/>
+          </ns0:cNvSpPr>
+          <ns0:nvPr>
+            <ns0:ph type="sldNum" idx="5"/>
+          </ns0:nvPr>
+        </ns0:nvSpPr>
+        <ns0:spPr/>
+        <ns0:txBody>
+          <ns1:bodyPr/>
+          <ns1:lstStyle/>
+          <ns1:p/>
+        </ns0:txBody>
+      </ns0:sp>
+    </ns0:spTree>
+  </ns0:cSld>
+  <ns0:clrMapOvr>
+    <ns1:masterClrMapping/>
+  </ns0:clrMapOvr>
+</ns0:notes>
 </file>
 
 <file path=ppt/notesSlides/notesSlide7.xml><?xml version="1.0" encoding="utf-8"?>
-<p:notes xmlns:p="http://schemas.openxmlformats.org/presentationml/2006/main">
-  <p:cSld>
-    <p:spTree>
-      <p:nvGrpSpPr>
-        <p:cNvPr id="1" name=""/>
-        <p:cNvGrpSpPr/>
-        <p:nvPr/>
-      </p:nvGrpSpPr>
-      <p:grpSpPr>
-        <a:xfrm xmlns:a="http://schemas.openxmlformats.org/drawingml/2006/main"/>
-      </p:grpSpPr>
-      <p:sp>
-        <p:nvSpPr>
-          <p:cNvPr id="2" name="Slide Image Placeholder 1"/>
-          <p:cNvSpPr>
-            <a:spLocks xmlns:a="http://schemas.openxmlformats.org/drawingml/2006/main" noGrp="1"/>
-          </p:cNvSpPr>
-          <p:nvPr>
-            <p:ph type="sldImg" idx="0"/>
-          </p:nvPr>
-        </p:nvSpPr>
-        <p:spPr/>
-      </p:sp>
-      <p:sp>
-        <p:nvSpPr>
-          <p:cNvPr id="3" name="Notes Placeholder 2"/>
-          <p:cNvSpPr>
-            <a:spLocks xmlns:a="http://schemas.openxmlformats.org/drawingml/2006/main" noGrp="1"/>
-          </p:cNvSpPr>
-          <p:nvPr>
-            <p:ph type="body" idx="1"/>
-          </p:nvPr>
-        </p:nvSpPr>
-        <p:spPr/>
-        <p:txBody>
-          <a:bodyPr xmlns:a="http://schemas.openxmlformats.org/drawingml/2006/main"/>
-          <a:lstStyle xmlns:a="http://schemas.openxmlformats.org/drawingml/2006/main"/>
-          <a:p xmlns:a="http://schemas.openxmlformats.org/drawingml/2006/main">
-            <a:r>
-              <a:t>[목표 50초]</a:t>
-            </a:r>
-          </a:p>
-          <a:p xmlns:a="http://schemas.openxmlformats.org/drawingml/2006/main">
-            <a:r>
-              <a:t/>
-            </a:r>
-          </a:p>
-          <a:p xmlns:a="http://schemas.openxmlformats.org/drawingml/2006/main">
-            <a:r>
-              <a:t>고른 장소를 일정에 넣을 때는 이미 확정한 예약을 먼저 배치합니다. 그 사이에 다른 장소를 넣어도 되는지 영업시간, 체류시간, 앞뒤 이동시간을 검사합니다.</a:t>
-            </a:r>
-          </a:p>
-          <a:p xmlns:a="http://schemas.openxmlformats.org/drawingml/2006/main">
-            <a:r>
-              <a:t/>
-            </a:r>
-          </a:p>
-          <a:p xmlns:a="http://schemas.openxmlformats.org/drawingml/2006/main">
-            <a:r>
-              <a:t>예를 들어 빈 시간이 두 시간인데 식당에서 90분을 보내고 양쪽 이동에 각각 30분이 필요하면, 총 두 시간 반이라 넣으면 안 됩니다. 머무는 시간만 보고 일정이 된다고 판단하지 않도록 했습니다.</a:t>
-            </a:r>
-          </a:p>
-          <a:p xmlns:a="http://schemas.openxmlformats.org/drawingml/2006/main">
-            <a:r>
-              <a:t/>
-            </a:r>
-          </a:p>
-          <a:p xmlns:a="http://schemas.openxmlformats.org/drawingml/2006/main">
-            <a:r>
-              <a:t>편집은 바로 원본을 바꾸는 대신 먼저 미리보기를 보여줍니다. 뒤 일정에 어떤 영향이 있는지 보고 적용하고, 마음에 들지 않으면 되돌릴 수 있습니다. 고정 예약끼리 겹쳐도 임의로 이동하지 않습니다. 그리고 일정에서 항목을 지우는 것과 실제 외부 예약을 취소하는 것은 별개입니다.</a:t>
-            </a:r>
-          </a:p>
-          <a:p xmlns:a="http://schemas.openxmlformats.org/drawingml/2006/main">
-            <a:r>
-              <a:t/>
-            </a:r>
-          </a:p>
-          <a:p xmlns:a="http://schemas.openxmlformats.org/drawingml/2006/main">
-            <a:r>
-              <a:t>화면 안내: 일정 화면과 오른쪽의 120분·150분 예시를 번갈아 짚습니다.</a:t>
-            </a:r>
-          </a:p>
-          <a:p xmlns:a="http://schemas.openxmlformats.org/drawingml/2006/main">
-            <a:r>
-              <a:t/>
-            </a:r>
-          </a:p>
-          <a:p xmlns:a="http://schemas.openxmlformats.org/drawingml/2006/main">
-            <a:r>
-              <a:t>낭독하지 않음</a:t>
-            </a:r>
-          </a:p>
-          <a:p xmlns:a="http://schemas.openxmlformats.org/drawingml/2006/main">
-            <a:r>
-              <a:t>코드·기능: https://github.com/Jin-s-work/Travel-Agent</a:t>
-            </a:r>
-          </a:p>
-          <a:p xmlns:a="http://schemas.openxmlformats.org/drawingml/2006/main">
-            <a:r>
-              <a:t>모델과 수식: docs/service-v4/RECOMMENDATION_MODEL.md</a:t>
-            </a:r>
-          </a:p>
-          <a:p xmlns:a="http://schemas.openxmlformats.org/drawingml/2006/main">
-            <a:r>
-              <a:t>합성 개발 평가: docs/service-v4/reports/hybrid-v4-benchmark.md (실제 정확도·만족도 미측정)</a:t>
-            </a:r>
-          </a:p>
-          <a:p xmlns:a="http://schemas.openxmlformats.org/drawingml/2006/main">
-            <a:r>
-              <a:t>화면·사진: docs/presentation/CREDITS.md (2026-10-07 기존 합성 계정 화면). 엄격 언어 추천은 실제 품질 검증 전 OFF.</a:t>
-            </a:r>
-          </a:p>
-        </p:txBody>
-      </p:sp>
-      <p:sp>
-        <p:nvSpPr>
-          <p:cNvPr id="4" name="Slide Number Placeholder 3"/>
-          <p:cNvSpPr>
-            <a:spLocks xmlns:a="http://schemas.openxmlformats.org/drawingml/2006/main" noGrp="1"/>
-          </p:cNvSpPr>
-          <p:nvPr>
-            <p:ph type="sldNum" idx="5"/>
-          </p:nvPr>
-        </p:nvSpPr>
-        <p:spPr/>
-        <p:txBody>
-          <a:bodyPr xmlns:a="http://schemas.openxmlformats.org/drawingml/2006/main"/>
-          <a:lstStyle xmlns:a="http://schemas.openxmlformats.org/drawingml/2006/main"/>
-          <a:p xmlns:a="http://schemas.openxmlformats.org/drawingml/2006/main"/>
-        </p:txBody>
-      </p:sp>
-    </p:spTree>
-  </p:cSld>
-  <p:clrMapOvr>
-    <a:masterClrMapping xmlns:a="http://schemas.openxmlformats.org/drawingml/2006/main"/>
-  </p:clrMapOvr>
-</p:notes>
+<ns0:notes xmlns:ns0="http://schemas.openxmlformats.org/presentationml/2006/main" xmlns:ns1="http://schemas.openxmlformats.org/drawingml/2006/main">
+  <ns0:cSld>
+    <ns0:spTree>
+      <ns0:nvGrpSpPr>
+        <ns0:cNvPr id="1" name=""/>
+        <ns0:cNvGrpSpPr/>
+        <ns0:nvPr/>
+      </ns0:nvGrpSpPr>
+      <ns0:grpSpPr>
+        <ns1:xfrm/>
+      </ns0:grpSpPr>
+      <ns0:sp>
+        <ns0:nvSpPr>
+          <ns0:cNvPr id="2" name="Slide Image Placeholder 1"/>
+          <ns0:cNvSpPr>
+            <ns1:spLocks noGrp="1"/>
+          </ns0:cNvSpPr>
+          <ns0:nvPr>
+            <ns0:ph type="sldImg" idx="0"/>
+          </ns0:nvPr>
+        </ns0:nvSpPr>
+        <ns0:spPr/>
+      </ns0:sp>
+      <ns0:sp>
+        <ns0:nvSpPr>
+          <ns0:cNvPr id="3" name="Notes Placeholder 2"/>
+          <ns0:cNvSpPr>
+            <ns1:spLocks noGrp="1"/>
+          </ns0:cNvSpPr>
+          <ns0:nvPr>
+            <ns0:ph type="body" idx="1"/>
+          </ns0:nvPr>
+        </ns0:nvSpPr>
+        <ns0:spPr/>
+        <ns0:txBody>
+          <ns1:bodyPr/>
+          <ns1:lstStyle/>
+          <ns1:p>
+            <ns1:r>
+              <ns1:t/>
+            </ns1:r>
+          </ns1:p>
+          <ns1:p>
+            <ns1:r>
+              <ns1:t/>
+            </ns1:r>
+          </ns1:p>
+          <ns1:p>
+            <ns1:r>
+              <ns1:t/>
+            </ns1:r>
+          </ns1:p>
+          <ns1:p>
+            <ns1:r>
+              <ns1:t/>
+            </ns1:r>
+          </ns1:p>
+          <ns1:p>
+            <ns1:r>
+              <ns1:t/>
+            </ns1:r>
+          </ns1:p>
+          <ns1:p>
+            <ns1:r>
+              <ns1:t/>
+            </ns1:r>
+          </ns1:p>
+          <ns1:p>
+            <ns1:r>
+              <ns1:t/>
+            </ns1:r>
+          </ns1:p>
+          <ns1:p>
+            <ns1:r>
+              <ns1:t/>
+            </ns1:r>
+          </ns1:p>
+          <ns1:p>
+            <ns1:r>
+              <ns1:t/>
+            </ns1:r>
+          </ns1:p>
+          <ns1:p>
+            <ns1:r>
+              <ns1:t/>
+            </ns1:r>
+          </ns1:p>
+          <ns1:p>
+            <ns1:r>
+              <ns1:t/>
+            </ns1:r>
+          </ns1:p>
+          <ns1:p>
+            <ns1:r>
+              <ns1:t/>
+            </ns1:r>
+          </ns1:p>
+          <ns1:p>
+            <ns1:r>
+              <ns1:t/>
+            </ns1:r>
+          </ns1:p>
+          <ns1:p>
+            <ns1:r>
+              <ns1:t/>
+            </ns1:r>
+          </ns1:p>
+          <ns1:p>
+            <ns1:r>
+              <ns1:t/>
+            </ns1:r>
+          </ns1:p>
+        </ns0:txBody>
+      </ns0:sp>
+      <ns0:sp>
+        <ns0:nvSpPr>
+          <ns0:cNvPr id="4" name="Slide Number Placeholder 3"/>
+          <ns0:cNvSpPr>
+            <ns1:spLocks noGrp="1"/>
+          </ns0:cNvSpPr>
+          <ns0:nvPr>
+            <ns0:ph type="sldNum" idx="5"/>
+          </ns0:nvPr>
+        </ns0:nvSpPr>
+        <ns0:spPr/>
+        <ns0:txBody>
+          <ns1:bodyPr/>
+          <ns1:lstStyle/>
+          <ns1:p/>
+        </ns0:txBody>
+      </ns0:sp>
+    </ns0:spTree>
+  </ns0:cSld>
+  <ns0:clrMapOvr>
+    <ns1:masterClrMapping/>
+  </ns0:clrMapOvr>
+</ns0:notes>
 </file>
 
 <file path=ppt/notesSlides/notesSlide8.xml><?xml version="1.0" encoding="utf-8"?>
-<p:notes xmlns:p="http://schemas.openxmlformats.org/presentationml/2006/main">
-  <p:cSld>
-    <p:spTree>
-      <p:nvGrpSpPr>
-        <p:cNvPr id="1" name=""/>
-        <p:cNvGrpSpPr/>
-        <p:nvPr/>
-      </p:nvGrpSpPr>
-      <p:grpSpPr>
-        <a:xfrm xmlns:a="http://schemas.openxmlformats.org/drawingml/2006/main"/>
-      </p:grpSpPr>
-      <p:sp>
-        <p:nvSpPr>
-          <p:cNvPr id="2" name="Slide Image Placeholder 1"/>
-          <p:cNvSpPr>
-            <a:spLocks xmlns:a="http://schemas.openxmlformats.org/drawingml/2006/main" noGrp="1"/>
-          </p:cNvSpPr>
-          <p:nvPr>
-            <p:ph type="sldImg" idx="0"/>
-          </p:nvPr>
-        </p:nvSpPr>
-        <p:spPr/>
-      </p:sp>
-      <p:sp>
-        <p:nvSpPr>
-          <p:cNvPr id="3" name="Notes Placeholder 2"/>
-          <p:cNvSpPr>
-            <a:spLocks xmlns:a="http://schemas.openxmlformats.org/drawingml/2006/main" noGrp="1"/>
-          </p:cNvSpPr>
-          <p:nvPr>
-            <p:ph type="body" idx="1"/>
-          </p:nvPr>
-        </p:nvSpPr>
-        <p:spPr/>
-        <p:txBody>
-          <a:bodyPr xmlns:a="http://schemas.openxmlformats.org/drawingml/2006/main"/>
-          <a:lstStyle xmlns:a="http://schemas.openxmlformats.org/drawingml/2006/main"/>
-          <a:p xmlns:a="http://schemas.openxmlformats.org/drawingml/2006/main">
-            <a:r>
-              <a:t>[목표 55초]</a:t>
-            </a:r>
-          </a:p>
-          <a:p xmlns:a="http://schemas.openxmlformats.org/drawingml/2006/main">
-            <a:r>
-              <a:t/>
-            </a:r>
-          </a:p>
-          <a:p xmlns:a="http://schemas.openxmlformats.org/drawingml/2006/main">
-            <a:r>
-              <a:t>추천이 달라졌다는 걸 확인하기 위해 이전 모델과 같은 입력으로 비교하는 평가 도구도 만들었습니다. 도쿄와 바르셀로나를 대상으로 취향, 거리, 평점, 조건 위반 등을 다룬 열두 개의 합성 시나리오입니다.</a:t>
-            </a:r>
-          </a:p>
-          <a:p xmlns:a="http://schemas.openxmlformats.org/drawingml/2006/main">
-            <a:r>
-              <a:t/>
-            </a:r>
-          </a:p>
-          <a:p xmlns:a="http://schemas.openxmlformats.org/drawingml/2006/main">
-            <a:r>
-              <a:t>여기서 NDCG는 적합한 후보가 앞에 오는 정도를 보는 지표입니다. 이전 모델은 약 0.42, 새 모델은 약 1.00으로 나왔습니다. 상위 세 칸 중 적합한 후보의 비율인 Precision도 약 0.39에서 0.78로 높아졌습니다.</a:t>
-            </a:r>
-          </a:p>
-          <a:p xmlns:a="http://schemas.openxmlformats.org/drawingml/2006/main">
-            <a:r>
-              <a:t/>
-            </a:r>
-          </a:p>
-          <a:p xmlns:a="http://schemas.openxmlformats.org/drawingml/2006/main">
-            <a:r>
-              <a:t>다만 이것을 실제 추천 정확도가 99퍼센트라고 말할 수는 없습니다. 제가 만든 시나리오와 기대 등급에 대한 개발 시험이기 때문입니다. 독립적인 평가 자료는 아직 없습니다. 실제 성능은 다른 사람이 순위를 모르는 상태에서 후보를 평가한 자료와 방문 경험으로 확인해야 합니다. 계산 시간도 조금 늘어서, 속도까지 개선됐다고 보지는 않습니다.</a:t>
-            </a:r>
-          </a:p>
-          <a:p xmlns:a="http://schemas.openxmlformats.org/drawingml/2006/main">
-            <a:r>
-              <a:t/>
-            </a:r>
-          </a:p>
-          <a:p xmlns:a="http://schemas.openxmlformats.org/drawingml/2006/main">
-            <a:r>
-              <a:t>화면 안내: NDCG 막대를 보여준 뒤 하단의 합성 개발 평가라는 한계를 설명합니다.</a:t>
-            </a:r>
-          </a:p>
-          <a:p xmlns:a="http://schemas.openxmlformats.org/drawingml/2006/main">
-            <a:r>
-              <a:t/>
-            </a:r>
-          </a:p>
-          <a:p xmlns:a="http://schemas.openxmlformats.org/drawingml/2006/main">
-            <a:r>
-              <a:t>낭독하지 않음</a:t>
-            </a:r>
-          </a:p>
-          <a:p xmlns:a="http://schemas.openxmlformats.org/drawingml/2006/main">
-            <a:r>
-              <a:t>코드·기능: https://github.com/Jin-s-work/Travel-Agent</a:t>
-            </a:r>
-          </a:p>
-          <a:p xmlns:a="http://schemas.openxmlformats.org/drawingml/2006/main">
-            <a:r>
-              <a:t>모델과 수식: docs/service-v4/RECOMMENDATION_MODEL.md</a:t>
-            </a:r>
-          </a:p>
-          <a:p xmlns:a="http://schemas.openxmlformats.org/drawingml/2006/main">
-            <a:r>
-              <a:t>합성 개발 평가: docs/service-v4/reports/hybrid-v4-benchmark.md (실제 정확도·만족도 미측정)</a:t>
-            </a:r>
-          </a:p>
-          <a:p xmlns:a="http://schemas.openxmlformats.org/drawingml/2006/main">
-            <a:r>
-              <a:t>화면·사진: docs/presentation/CREDITS.md (2026-10-07 기존 합성 계정 화면). 엄격 언어 추천은 실제 품질 검증 전 OFF.</a:t>
-            </a:r>
-          </a:p>
-        </p:txBody>
-      </p:sp>
-      <p:sp>
-        <p:nvSpPr>
-          <p:cNvPr id="4" name="Slide Number Placeholder 3"/>
-          <p:cNvSpPr>
-            <a:spLocks xmlns:a="http://schemas.openxmlformats.org/drawingml/2006/main" noGrp="1"/>
-          </p:cNvSpPr>
-          <p:nvPr>
-            <p:ph type="sldNum" idx="5"/>
-          </p:nvPr>
-        </p:nvSpPr>
-        <p:spPr/>
-        <p:txBody>
-          <a:bodyPr xmlns:a="http://schemas.openxmlformats.org/drawingml/2006/main"/>
-          <a:lstStyle xmlns:a="http://schemas.openxmlformats.org/drawingml/2006/main"/>
-          <a:p xmlns:a="http://schemas.openxmlformats.org/drawingml/2006/main"/>
-        </p:txBody>
-      </p:sp>
-    </p:spTree>
-  </p:cSld>
-  <p:clrMapOvr>
-    <a:masterClrMapping xmlns:a="http://schemas.openxmlformats.org/drawingml/2006/main"/>
-  </p:clrMapOvr>
-</p:notes>
+<ns0:notes xmlns:ns0="http://schemas.openxmlformats.org/presentationml/2006/main" xmlns:ns1="http://schemas.openxmlformats.org/drawingml/2006/main">
+  <ns0:cSld>
+    <ns0:spTree>
+      <ns0:nvGrpSpPr>
+        <ns0:cNvPr id="1" name=""/>
+        <ns0:cNvGrpSpPr/>
+        <ns0:nvPr/>
+      </ns0:nvGrpSpPr>
+      <ns0:grpSpPr>
+        <ns1:xfrm/>
+      </ns0:grpSpPr>
+      <ns0:sp>
+        <ns0:nvSpPr>
+          <ns0:cNvPr id="2" name="Slide Image Placeholder 1"/>
+          <ns0:cNvSpPr>
+            <ns1:spLocks noGrp="1"/>
+          </ns0:cNvSpPr>
+          <ns0:nvPr>
+            <ns0:ph type="sldImg" idx="0"/>
+          </ns0:nvPr>
+        </ns0:nvSpPr>
+        <ns0:spPr/>
+      </ns0:sp>
+      <ns0:sp>
+        <ns0:nvSpPr>
+          <ns0:cNvPr id="3" name="Notes Placeholder 2"/>
+          <ns0:cNvSpPr>
+            <ns1:spLocks noGrp="1"/>
+          </ns0:cNvSpPr>
+          <ns0:nvPr>
+            <ns0:ph type="body" idx="1"/>
+          </ns0:nvPr>
+        </ns0:nvSpPr>
+        <ns0:spPr/>
+        <ns0:txBody>
+          <ns1:bodyPr/>
+          <ns1:lstStyle/>
+          <ns1:p>
+            <ns1:r>
+              <ns1:t/>
+            </ns1:r>
+          </ns1:p>
+          <ns1:p>
+            <ns1:r>
+              <ns1:t/>
+            </ns1:r>
+          </ns1:p>
+          <ns1:p>
+            <ns1:r>
+              <ns1:t/>
+            </ns1:r>
+          </ns1:p>
+          <ns1:p>
+            <ns1:r>
+              <ns1:t/>
+            </ns1:r>
+          </ns1:p>
+          <ns1:p>
+            <ns1:r>
+              <ns1:t/>
+            </ns1:r>
+          </ns1:p>
+          <ns1:p>
+            <ns1:r>
+              <ns1:t/>
+            </ns1:r>
+          </ns1:p>
+          <ns1:p>
+            <ns1:r>
+              <ns1:t/>
+            </ns1:r>
+          </ns1:p>
+          <ns1:p>
+            <ns1:r>
+              <ns1:t/>
+            </ns1:r>
+          </ns1:p>
+          <ns1:p>
+            <ns1:r>
+              <ns1:t/>
+            </ns1:r>
+          </ns1:p>
+          <ns1:p>
+            <ns1:r>
+              <ns1:t/>
+            </ns1:r>
+          </ns1:p>
+          <ns1:p>
+            <ns1:r>
+              <ns1:t/>
+            </ns1:r>
+          </ns1:p>
+          <ns1:p>
+            <ns1:r>
+              <ns1:t/>
+            </ns1:r>
+          </ns1:p>
+          <ns1:p>
+            <ns1:r>
+              <ns1:t/>
+            </ns1:r>
+          </ns1:p>
+          <ns1:p>
+            <ns1:r>
+              <ns1:t/>
+            </ns1:r>
+          </ns1:p>
+          <ns1:p>
+            <ns1:r>
+              <ns1:t/>
+            </ns1:r>
+          </ns1:p>
+        </ns0:txBody>
+      </ns0:sp>
+      <ns0:sp>
+        <ns0:nvSpPr>
+          <ns0:cNvPr id="4" name="Slide Number Placeholder 3"/>
+          <ns0:cNvSpPr>
+            <ns1:spLocks noGrp="1"/>
+          </ns0:cNvSpPr>
+          <ns0:nvPr>
+            <ns0:ph type="sldNum" idx="5"/>
+          </ns0:nvPr>
+        </ns0:nvSpPr>
+        <ns0:spPr/>
+        <ns0:txBody>
+          <ns1:bodyPr/>
+          <ns1:lstStyle/>
+          <ns1:p/>
+        </ns0:txBody>
+      </ns0:sp>
+    </ns0:spTree>
+  </ns0:cSld>
+  <ns0:clrMapOvr>
+    <ns1:masterClrMapping/>
+  </ns0:clrMapOvr>
+</ns0:notes>
 </file>
 
 <file path=ppt/notesSlides/notesSlide9.xml><?xml version="1.0" encoding="utf-8"?>
-<p:notes xmlns:p="http://schemas.openxmlformats.org/presentationml/2006/main">
-  <p:cSld>
-    <p:spTree>
-      <p:nvGrpSpPr>
-        <p:cNvPr id="1" name=""/>
-        <p:cNvGrpSpPr/>
-        <p:nvPr/>
-      </p:nvGrpSpPr>
-      <p:grpSpPr>
-        <a:xfrm xmlns:a="http://schemas.openxmlformats.org/drawingml/2006/main"/>
-      </p:grpSpPr>
-      <p:sp>
-        <p:nvSpPr>
-          <p:cNvPr id="2" name="Slide Image Placeholder 1"/>
-          <p:cNvSpPr>
-            <a:spLocks xmlns:a="http://schemas.openxmlformats.org/drawingml/2006/main" noGrp="1"/>
-          </p:cNvSpPr>
-          <p:nvPr>
-            <p:ph type="sldImg" idx="0"/>
-          </p:nvPr>
-        </p:nvSpPr>
-        <p:spPr/>
-      </p:sp>
-      <p:sp>
-        <p:nvSpPr>
-          <p:cNvPr id="3" name="Notes Placeholder 2"/>
-          <p:cNvSpPr>
-            <a:spLocks xmlns:a="http://schemas.openxmlformats.org/drawingml/2006/main" noGrp="1"/>
-          </p:cNvSpPr>
-          <p:nvPr>
-            <p:ph type="body" idx="1"/>
-          </p:nvPr>
-        </p:nvSpPr>
-        <p:spPr/>
-        <p:txBody>
-          <a:bodyPr xmlns:a="http://schemas.openxmlformats.org/drawingml/2006/main"/>
-          <a:lstStyle xmlns:a="http://schemas.openxmlformats.org/drawingml/2006/main"/>
-          <a:p xmlns:a="http://schemas.openxmlformats.org/drawingml/2006/main">
-            <a:r>
-              <a:t>[목표 40초]</a:t>
-            </a:r>
-          </a:p>
-          <a:p xmlns:a="http://schemas.openxmlformats.org/drawingml/2006/main">
-            <a:r>
-              <a:t/>
-            </a:r>
-          </a:p>
-          <a:p xmlns:a="http://schemas.openxmlformats.org/drawingml/2006/main">
-            <a:r>
-              <a:t>장소를 고른 뒤에 필요한 기능도 만들었습니다. 예약이 언제 열리는지 할 일로 정리하고, 캘린더에 넣을 ICS 파일이나 현지어 문의문 초안을 만들 수 있습니다. 문의를 자동으로 보내거나 대신 결제하지는 않습니다.</a:t>
-            </a:r>
-          </a:p>
-          <a:p xmlns:a="http://schemas.openxmlformats.org/drawingml/2006/main">
-            <a:r>
-              <a:t/>
-            </a:r>
-          </a:p>
-          <a:p xmlns:a="http://schemas.openxmlformats.org/drawingml/2006/main">
-            <a:r>
-              <a:t>여행 중 비가 오거나 너무 피곤하면, 전체 일정을 다시 만드는 대신 영향을 받는 구간의 대체안을 먼저 볼 수 있습니다. 오늘 보기에서는 현지 날짜 기준으로 다음 일정을 확인합니다.</a:t>
-            </a:r>
-          </a:p>
-          <a:p xmlns:a="http://schemas.openxmlformats.org/drawingml/2006/main">
-            <a:r>
-              <a:t/>
-            </a:r>
-          </a:p>
-          <a:p xmlns:a="http://schemas.openxmlformats.org/drawingml/2006/main">
-            <a:r>
-              <a:t>예상 지출은 엔화와 유로처럼 통화별로 나눠 보여주고, 가격을 모르는 항목도 함께 표시합니다. 오프라인 읽기 기능도 구현했지만, 실제 기기별 검증을 더 진행한 뒤 사용 범위를 넓힐 계획입니다.</a:t>
-            </a:r>
-          </a:p>
-          <a:p xmlns:a="http://schemas.openxmlformats.org/drawingml/2006/main">
-            <a:r>
-              <a:t/>
-            </a:r>
-          </a:p>
-          <a:p xmlns:a="http://schemas.openxmlformats.org/drawingml/2006/main">
-            <a:r>
-              <a:t>화면 안내: 예약 준비, Plan B, 오늘 보기, 예상 지출의 사용 상황을 짧게 설명합니다.</a:t>
-            </a:r>
-          </a:p>
-          <a:p xmlns:a="http://schemas.openxmlformats.org/drawingml/2006/main">
-            <a:r>
-              <a:t/>
-            </a:r>
-          </a:p>
-          <a:p xmlns:a="http://schemas.openxmlformats.org/drawingml/2006/main">
-            <a:r>
-              <a:t>낭독하지 않음</a:t>
-            </a:r>
-          </a:p>
-          <a:p xmlns:a="http://schemas.openxmlformats.org/drawingml/2006/main">
-            <a:r>
-              <a:t>코드·기능: https://github.com/Jin-s-work/Travel-Agent</a:t>
-            </a:r>
-          </a:p>
-          <a:p xmlns:a="http://schemas.openxmlformats.org/drawingml/2006/main">
-            <a:r>
-              <a:t>모델과 수식: docs/service-v4/RECOMMENDATION_MODEL.md</a:t>
-            </a:r>
-          </a:p>
-          <a:p xmlns:a="http://schemas.openxmlformats.org/drawingml/2006/main">
-            <a:r>
-              <a:t>합성 개발 평가: docs/service-v4/reports/hybrid-v4-benchmark.md (실제 정확도·만족도 미측정)</a:t>
-            </a:r>
-          </a:p>
-          <a:p xmlns:a="http://schemas.openxmlformats.org/drawingml/2006/main">
-            <a:r>
-              <a:t>화면·사진: docs/presentation/CREDITS.md (2026-10-07 기존 합성 계정 화면). 엄격 언어 추천은 실제 품질 검증 전 OFF.</a:t>
-            </a:r>
-          </a:p>
-        </p:txBody>
-      </p:sp>
-      <p:sp>
-        <p:nvSpPr>
-          <p:cNvPr id="4" name="Slide Number Placeholder 3"/>
-          <p:cNvSpPr>
-            <a:spLocks xmlns:a="http://schemas.openxmlformats.org/drawingml/2006/main" noGrp="1"/>
-          </p:cNvSpPr>
-          <p:nvPr>
-            <p:ph type="sldNum" idx="5"/>
-          </p:nvPr>
-        </p:nvSpPr>
-        <p:spPr/>
-        <p:txBody>
-          <a:bodyPr xmlns:a="http://schemas.openxmlformats.org/drawingml/2006/main"/>
-          <a:lstStyle xmlns:a="http://schemas.openxmlformats.org/drawingml/2006/main"/>
-          <a:p xmlns:a="http://schemas.openxmlformats.org/drawingml/2006/main"/>
-        </p:txBody>
-      </p:sp>
-    </p:spTree>
-  </p:cSld>
-  <p:clrMapOvr>
-    <a:masterClrMapping xmlns:a="http://schemas.openxmlformats.org/drawingml/2006/main"/>
-  </p:clrMapOvr>
-</p:notes>
+<ns0:notes xmlns:ns0="http://schemas.openxmlformats.org/presentationml/2006/main" xmlns:ns1="http://schemas.openxmlformats.org/drawingml/2006/main">
+  <ns0:cSld>
+    <ns0:spTree>
+      <ns0:nvGrpSpPr>
+        <ns0:cNvPr id="1" name=""/>
+        <ns0:cNvGrpSpPr/>
+        <ns0:nvPr/>
+      </ns0:nvGrpSpPr>
+      <ns0:grpSpPr>
+        <ns1:xfrm/>
+      </ns0:grpSpPr>
+      <ns0:sp>
+        <ns0:nvSpPr>
+          <ns0:cNvPr id="2" name="Slide Image Placeholder 1"/>
+          <ns0:cNvSpPr>
+            <ns1:spLocks noGrp="1"/>
+          </ns0:cNvSpPr>
+          <ns0:nvPr>
+            <ns0:ph type="sldImg" idx="0"/>
+          </ns0:nvPr>
+        </ns0:nvSpPr>
+        <ns0:spPr/>
+      </ns0:sp>
+      <ns0:sp>
+        <ns0:nvSpPr>
+          <ns0:cNvPr id="3" name="Notes Placeholder 2"/>
+          <ns0:cNvSpPr>
+            <ns1:spLocks noGrp="1"/>
+          </ns0:cNvSpPr>
+          <ns0:nvPr>
+            <ns0:ph type="body" idx="1"/>
+          </ns0:nvPr>
+        </ns0:nvSpPr>
+        <ns0:spPr/>
+        <ns0:txBody>
+          <ns1:bodyPr/>
+          <ns1:lstStyle/>
+          <ns1:p>
+            <ns1:r>
+              <ns1:t/>
+            </ns1:r>
+          </ns1:p>
+          <ns1:p>
+            <ns1:r>
+              <ns1:t/>
+            </ns1:r>
+          </ns1:p>
+          <ns1:p>
+            <ns1:r>
+              <ns1:t/>
+            </ns1:r>
+          </ns1:p>
+          <ns1:p>
+            <ns1:r>
+              <ns1:t/>
+            </ns1:r>
+          </ns1:p>
+          <ns1:p>
+            <ns1:r>
+              <ns1:t/>
+            </ns1:r>
+          </ns1:p>
+          <ns1:p>
+            <ns1:r>
+              <ns1:t/>
+            </ns1:r>
+          </ns1:p>
+          <ns1:p>
+            <ns1:r>
+              <ns1:t/>
+            </ns1:r>
+          </ns1:p>
+          <ns1:p>
+            <ns1:r>
+              <ns1:t/>
+            </ns1:r>
+          </ns1:p>
+          <ns1:p>
+            <ns1:r>
+              <ns1:t/>
+            </ns1:r>
+          </ns1:p>
+          <ns1:p>
+            <ns1:r>
+              <ns1:t/>
+            </ns1:r>
+          </ns1:p>
+          <ns1:p>
+            <ns1:r>
+              <ns1:t/>
+            </ns1:r>
+          </ns1:p>
+          <ns1:p>
+            <ns1:r>
+              <ns1:t/>
+            </ns1:r>
+          </ns1:p>
+          <ns1:p>
+            <ns1:r>
+              <ns1:t/>
+            </ns1:r>
+          </ns1:p>
+          <ns1:p>
+            <ns1:r>
+              <ns1:t/>
+            </ns1:r>
+          </ns1:p>
+          <ns1:p>
+            <ns1:r>
+              <ns1:t/>
+            </ns1:r>
+          </ns1:p>
+        </ns0:txBody>
+      </ns0:sp>
+      <ns0:sp>
+        <ns0:nvSpPr>
+          <ns0:cNvPr id="4" name="Slide Number Placeholder 3"/>
+          <ns0:cNvSpPr>
+            <ns1:spLocks noGrp="1"/>
+          </ns0:cNvSpPr>
+          <ns0:nvPr>
+            <ns0:ph type="sldNum" idx="5"/>
+          </ns0:nvPr>
+        </ns0:nvSpPr>
+        <ns0:spPr/>
+        <ns0:txBody>
+          <ns1:bodyPr/>
+          <ns1:lstStyle/>
+          <ns1:p/>
+        </ns0:txBody>
+      </ns0:sp>
+    </ns0:spTree>
+  </ns0:cSld>
+  <ns0:clrMapOvr>
+    <ns1:masterClrMapping/>
+  </ns0:clrMapOvr>
+</ns0:notes>
 </file>
 
 <file path=ppt/slideLayouts/slideLayout1.xml><?xml version="1.0" encoding="utf-8"?>
